--- a/10-Knowledge-Products/KP1-GEA/videos/module_4/en/decks/KP1_M4_4.2_Deck_v0.2.pptx
+++ b/10-Knowledge-Products/KP1-GEA/videos/module_4/en/decks/KP1_M4_4.2_Deck_v0.2.pptx
@@ -14,14 +14,14 @@
     <p:handoutMasterId r:id="rId47"/>
   </p:handoutMasterIdLst>
   <p:sldIdLst>
-    <p:sldId id="2681" r:id="rId8"/>
-    <p:sldId id="2703" r:id="rId25"/>
     <p:sldId id="2704" r:id="rId26"/>
     <p:sldId id="2705" r:id="rId27"/>
     <p:sldId id="2706" r:id="rId28"/>
     <p:sldId id="2707" r:id="rId29"/>
     <p:sldId id="2708" r:id="rId30"/>
     <p:sldId id="2709" r:id="rId31"/>
+    <p:sldId id="2710" r:id="rId32"/>
+    <p:sldId id="2711" r:id="rId33"/>
   </p:sldIdLst>
   <p:sldSz cx="12192000" cy="6858000"/>
   <p:notesSz cx="6858000" cy="9144000"/>
@@ -888,76 +888,6 @@
 </p:notesMaster>
 </file>
 
-<file path=ppt/notesSlides/notesSlide10.xml><?xml version="1.0" encoding="utf-8"?>
-<p:notes xmlns:a="http://schemas.openxmlformats.org/drawingml/2006/main" xmlns:p="http://schemas.openxmlformats.org/presentationml/2006/main" xmlns:r="http://schemas.openxmlformats.org/officeDocument/2006/relationships">
-  <p:cSld>
-    <p:spTree>
-      <p:nvGrpSpPr>
-        <p:cNvPr id="1" name=""/>
-        <p:cNvGrpSpPr/>
-        <p:nvPr/>
-      </p:nvGrpSpPr>
-      <p:grpSpPr>
-        <a:xfrm>
-          <a:off x="0" y="0"/>
-          <a:ext cx="0" cy="0"/>
-          <a:chOff x="0" y="0"/>
-          <a:chExt cx="0" cy="0"/>
-        </a:xfrm>
-      </p:grpSpPr>
-      <p:sp>
-        <p:nvSpPr>
-          <p:cNvPr id="2" name="Slide Image Placeholder 1"/>
-          <p:cNvSpPr>
-            <a:spLocks noGrp="1"/>
-          </p:cNvSpPr>
-          <p:nvPr>
-            <p:ph type="sldImg" idx="2"/>
-          </p:nvPr>
-        </p:nvSpPr>
-        <p:spPr/>
-      </p:sp>
-      <p:sp>
-        <p:nvSpPr>
-          <p:cNvPr id="3" name="Notes Placeholder 2"/>
-          <p:cNvSpPr>
-            <a:spLocks noGrp="1"/>
-          </p:cNvSpPr>
-          <p:nvPr>
-            <p:ph type="body" idx="3" sz="quarter"/>
-          </p:nvPr>
-        </p:nvSpPr>
-        <p:spPr/>
-        <p:txBody>
-          <a:bodyPr/>
-          <a:lstStyle/>
-          <a:p>
-            <a:r>
-              <a:t>VO, slide 1: The first phase is Discover. One question: what exists today? Not what is wrong — that comes later. An accurate picture of where the sector is now. On Progressa, Discovery takes about three to four weeks and produces a single deliverable: the Discovery brief.</a:t>
-            </a:r>
-          </a:p>
-        </p:txBody>
-      </p:sp>
-      <p:sp>
-        <p:nvSpPr>
-          <p:cNvPr id="4" name="Slide Number Placeholder 3"/>
-          <p:cNvSpPr>
-            <a:spLocks noGrp="1"/>
-          </p:cNvSpPr>
-          <p:nvPr>
-            <p:ph type="sldNum" idx="5" sz="quarter"/>
-          </p:nvPr>
-        </p:nvSpPr>
-        <p:spPr/>
-      </p:sp>
-    </p:spTree>
-  </p:cSld>
-  <p:clrMapOvr>
-    <a:masterClrMapping/>
-  </p:clrMapOvr>
-</p:notes>
-</file>
-
 <file path=ppt/notesSlides/notesSlide11.xml><?xml version="1.0" encoding="utf-8"?>
 <p:notes xmlns:a="http://schemas.openxmlformats.org/drawingml/2006/main" xmlns:p="http://schemas.openxmlformats.org/presentationml/2006/main" xmlns:r="http://schemas.openxmlformats.org/officeDocument/2006/relationships">
   <p:cSld>
@@ -1003,7 +933,7 @@
           <a:lstStyle/>
           <a:p>
             <a:r>
-              <a:t>VO: Discovery collects five things on Progressa. The strategies in force — the national digital strategy, the education sector plan. The systems that exist — the school census system, the exam-management system, the social grant system. The registries and who owns them — the learner lists, the identity register. The stakeholders — the ministry, the authorities, the donors funding each piece. And the legal framework — the data-protection act, the mandates of each body. You gather, you do not judge.</a:t>
+              <a:t>Title card — the cold open. The hosts name the module, the video number, the title and the single message on this slide; no scripted narration. Hold until the opener begins; the opener is narrated on the next slide.</a:t>
             </a:r>
           </a:p>
         </p:txBody>
@@ -1073,7 +1003,7 @@
           <a:lstStyle/>
           <a:p>
             <a:r>
-              <a:t>VO: The hardest discipline in Discovery is to describe without recommending. When your architects find that the Examination Authority keeps its own learner list, the urge is to write 'this should be fixed'. Resist it. Discovery records that the list exists, who owns it, how many learners it holds. The judgement — is this a problem, how severe, what priority — belongs to the next phase. Mixing them biases the assessment before you have the full picture. Discover first. Judge second.</a:t>
+              <a:t>VO: The first phase is Discover. One question: what exists today? Not what is wrong — that comes later. An accurate picture of where the sector is now. On Progressa, Discovery takes about three to four weeks and produces a single deliverable: the Discovery brief.</a:t>
             </a:r>
           </a:p>
         </p:txBody>
@@ -1143,7 +1073,7 @@
           <a:lstStyle/>
           <a:p>
             <a:r>
-              <a:t>VO: Progressa's Discovery brief lays it out plainly. Five institutions, classified. The systems each runs. The registries — and here the brief simply records the fact that three separate learner lists exist, in the census, the Examination Authority, and the grant programme. The data flows — mostly paper and manual re-entry between systems. The legal constraints — what each body is mandated to hold. No recommendations. Just the picture, accurate enough to build on.</a:t>
+              <a:t>VO: Discovery collects five things on Progressa. The strategies in force — the national digital strategy, the education sector plan. The systems that exist — the school census system, the exam-management system, the social grant system. The registries and who owns them — the learner lists, the identity register. The stakeholders — the ministry, the authorities, the donors funding each piece. And the legal framework — the data-protection act, the mandates of each body. You gather, you do not judge.</a:t>
             </a:r>
           </a:p>
         </p:txBody>
@@ -1213,7 +1143,7 @@
           <a:lstStyle/>
           <a:p>
             <a:r>
-              <a:t>VO: Discovery ends with the first of the lifecycle's four sign-offs. The senior decision-maker — on Progressa, the digitalisation officer chairing the EA Board — confirms one thing: the picture is accurate enough to build on. Not complete, not perfect — accurate. This gate is cheap and fast, and skipping it is expensive: an assessment built on a wrong picture produces wrong priorities. Get the picture signed off as true, and the next phase stands on solid ground.</a:t>
+              <a:t>VO: The hardest discipline in Discovery is to describe without recommending. When your architects find that the Examination Authority keeps its own learner list, the urge is to write 'this should be fixed'. Resist it. Discovery records that the list exists, who owns it, how many learners it holds. The judgement — is this a problem, how severe, what priority — belongs to the next phase. Mixing them biases the assessment before you have the full picture. Discover first. Judge second.</a:t>
             </a:r>
           </a:p>
         </p:txBody>
@@ -1283,13 +1213,7 @@
           <a:lstStyle/>
           <a:p>
             <a:r>
-              <a:t>PRACTICE BOX (on-screen only — never read it, never paraphrase it, never point at it). It replaces the narrated handoff: this video ends on the recap and the Sources slide.</a:t>
-            </a:r>
-          </a:p>
-          <a:p/>
-          <a:p>
-            <a:r>
-              <a:t>VO: That is Phase 1 on Progressa. One question — what exists today. One deliverable — the Discovery brief. One discipline — describe, do not recommend. One sign-off — the picture is accurate.</a:t>
+              <a:t>VO: Progressa's Discovery brief lays it out plainly. Five institutions, classified. The systems each runs. The registries — and here the brief simply records the fact that three separate learner lists exist, in the census, the Examination Authority, and the grant programme. The data flows — mostly paper and manual re-entry between systems. The legal constraints — what each body is mandated to hold. No recommendations. Just the picture, accurate enough to build on.</a:t>
             </a:r>
           </a:p>
         </p:txBody>
@@ -1359,7 +1283,7 @@
           <a:lstStyle/>
           <a:p>
             <a:r>
-              <a:t>Sources slide, held ~5 seconds at the end of the video. Links are compiled into the YouTube description per ITU convention; no URLs read aloud.</a:t>
+              <a:t>VO: Discovery ends with the first of the lifecycle's four sign-offs. The senior decision-maker — on Progressa, the digitalisation officer chairing the EA Board — confirms one thing: the picture is accurate enough to build on. Not complete, not perfect — accurate. This gate is cheap and fast, and skipping it is expensive: an assessment built on a wrong picture produces wrong priorities. Get the picture signed off as true, and the next phase stands on solid ground.</a:t>
             </a:r>
           </a:p>
         </p:txBody>
@@ -1384,7 +1308,7 @@
 </p:notes>
 </file>
 
-<file path=ppt/notesSlides/notesSlide21.xml><?xml version="1.0" encoding="utf-8"?>
+<file path=ppt/notesSlides/notesSlide17.xml><?xml version="1.0" encoding="utf-8"?>
 <p:notes xmlns:a="http://schemas.openxmlformats.org/drawingml/2006/main" xmlns:p="http://schemas.openxmlformats.org/presentationml/2006/main" xmlns:r="http://schemas.openxmlformats.org/officeDocument/2006/relationships">
   <p:cSld>
     <p:spTree>
@@ -1429,7 +1353,83 @@
           <a:lstStyle/>
           <a:p>
             <a:r>
-              <a:t>Title card for standalone video 4.2. Content slides are identical to the corresponding section of the combined deck KP1_M4_Deck_v0.2.pptx; voice-over is in each slide’s notes.</a:t>
+              <a:t>PRACTICE BOX (on-screen only — never read it, never paraphrase it, never point at it). It replaces the narrated handoff: this video ends on the recap and the Sources slide.</a:t>
+            </a:r>
+          </a:p>
+          <a:p/>
+          <a:p>
+            <a:r>
+              <a:t>VO: That is Phase 1 on Progressa. One question — what exists today. One deliverable — the Discovery brief. One discipline — describe, do not recommend. One sign-off — the picture is accurate.</a:t>
+            </a:r>
+          </a:p>
+        </p:txBody>
+      </p:sp>
+      <p:sp>
+        <p:nvSpPr>
+          <p:cNvPr id="4" name="Slide Number Placeholder 3"/>
+          <p:cNvSpPr>
+            <a:spLocks noGrp="1"/>
+          </p:cNvSpPr>
+          <p:nvPr>
+            <p:ph type="sldNum" idx="5" sz="quarter"/>
+          </p:nvPr>
+        </p:nvSpPr>
+        <p:spPr/>
+      </p:sp>
+    </p:spTree>
+  </p:cSld>
+  <p:clrMapOvr>
+    <a:masterClrMapping/>
+  </p:clrMapOvr>
+</p:notes>
+</file>
+
+<file path=ppt/notesSlides/notesSlide18.xml><?xml version="1.0" encoding="utf-8"?>
+<p:notes xmlns:a="http://schemas.openxmlformats.org/drawingml/2006/main" xmlns:p="http://schemas.openxmlformats.org/presentationml/2006/main" xmlns:r="http://schemas.openxmlformats.org/officeDocument/2006/relationships">
+  <p:cSld>
+    <p:spTree>
+      <p:nvGrpSpPr>
+        <p:cNvPr id="1" name=""/>
+        <p:cNvGrpSpPr/>
+        <p:nvPr/>
+      </p:nvGrpSpPr>
+      <p:grpSpPr>
+        <a:xfrm>
+          <a:off x="0" y="0"/>
+          <a:ext cx="0" cy="0"/>
+          <a:chOff x="0" y="0"/>
+          <a:chExt cx="0" cy="0"/>
+        </a:xfrm>
+      </p:grpSpPr>
+      <p:sp>
+        <p:nvSpPr>
+          <p:cNvPr id="2" name="Slide Image Placeholder 1"/>
+          <p:cNvSpPr>
+            <a:spLocks noGrp="1"/>
+          </p:cNvSpPr>
+          <p:nvPr>
+            <p:ph type="sldImg" idx="2"/>
+          </p:nvPr>
+        </p:nvSpPr>
+        <p:spPr/>
+      </p:sp>
+      <p:sp>
+        <p:nvSpPr>
+          <p:cNvPr id="3" name="Notes Placeholder 2"/>
+          <p:cNvSpPr>
+            <a:spLocks noGrp="1"/>
+          </p:cNvSpPr>
+          <p:nvPr>
+            <p:ph type="body" idx="3" sz="quarter"/>
+          </p:nvPr>
+        </p:nvSpPr>
+        <p:spPr/>
+        <p:txBody>
+          <a:bodyPr/>
+          <a:lstStyle/>
+          <a:p>
+            <a:r>
+              <a:t>Sources slide, held ~5 seconds at the end of the video. Links are compiled into the YouTube description per ITU convention; no URLs read aloud.</a:t>
             </a:r>
           </a:p>
         </p:txBody>
@@ -11590,906 +11590,6 @@
 </p:sldMaster>
 </file>
 
-<file path=ppt/slides/slide1.xml><?xml version="1.0" encoding="utf-8"?>
-<p:sld xmlns:a="http://schemas.openxmlformats.org/drawingml/2006/main" xmlns:r="http://schemas.openxmlformats.org/officeDocument/2006/relationships" xmlns:p="http://schemas.openxmlformats.org/presentationml/2006/main">
-  <p:cSld>
-    <p:spTree>
-      <p:nvGrpSpPr>
-        <p:cNvPr id="1" name=""/>
-        <p:cNvGrpSpPr/>
-        <p:nvPr/>
-      </p:nvGrpSpPr>
-      <p:grpSpPr>
-        <a:xfrm>
-          <a:off x="0" y="0"/>
-          <a:ext cx="0" cy="0"/>
-          <a:chOff x="0" y="0"/>
-          <a:chExt cx="0" cy="0"/>
-        </a:xfrm>
-      </p:grpSpPr>
-      <p:cxnSp>
-        <p:nvCxnSpPr>
-          <p:cNvPr id="11" name="Straight Connector 10">
-            <a:extLst>
-              <a:ext uri="{FF2B5EF4-FFF2-40B4-BE49-F238E27FC236}">
-                <a16:creationId xmlns:a16="http://schemas.microsoft.com/office/drawing/2014/main" id="{D9AD66F2-F7C0-4D03-9150-D28F17AC561D}"/>
-              </a:ext>
-            </a:extLst>
-          </p:cNvPr>
-          <p:cNvCxnSpPr>
-            <a:cxnSpLocks/>
-          </p:cNvCxnSpPr>
-          <p:nvPr/>
-        </p:nvCxnSpPr>
-        <p:spPr>
-          <a:xfrm>
-            <a:off x="373021" y="2198718"/>
-            <a:ext cx="6843567" cy="0"/>
-          </a:xfrm>
-          <a:prstGeom prst="line">
-            <a:avLst/>
-          </a:prstGeom>
-          <a:ln w="12700">
-            <a:solidFill>
-              <a:srgbClr val="009CD6"/>
-            </a:solidFill>
-          </a:ln>
-        </p:spPr>
-        <p:style>
-          <a:lnRef idx="1">
-            <a:schemeClr val="accent1"/>
-          </a:lnRef>
-          <a:fillRef idx="0">
-            <a:schemeClr val="accent1"/>
-          </a:fillRef>
-          <a:effectRef idx="0">
-            <a:schemeClr val="accent1"/>
-          </a:effectRef>
-          <a:fontRef idx="minor">
-            <a:schemeClr val="tx1"/>
-          </a:fontRef>
-        </p:style>
-      </p:cxnSp>
-      <p:sp>
-        <p:nvSpPr>
-          <p:cNvPr id="12" name="Title 9">
-            <a:extLst>
-              <a:ext uri="{FF2B5EF4-FFF2-40B4-BE49-F238E27FC236}">
-                <a16:creationId xmlns:a16="http://schemas.microsoft.com/office/drawing/2014/main" id="{EEB08032-CE0E-4986-AEDF-A41026C0E8B9}"/>
-              </a:ext>
-            </a:extLst>
-          </p:cNvPr>
-          <p:cNvSpPr txBox="1">
-            <a:spLocks/>
-          </p:cNvSpPr>
-          <p:nvPr/>
-        </p:nvSpPr>
-        <p:spPr>
-          <a:xfrm>
-            <a:off x="237734" y="702833"/>
-            <a:ext cx="6432007" cy="1218817"/>
-          </a:xfrm>
-          <a:prstGeom prst="rect">
-            <a:avLst/>
-          </a:prstGeom>
-        </p:spPr>
-        <p:txBody>
-          <a:bodyPr anchor="b">
-            <a:noAutofit/>
-          </a:bodyPr>
-          <a:lstStyle>
-            <a:lvl1pPr algn="l" defTabSz="914400" rtl="0" eaLnBrk="1" latinLnBrk="0" hangingPunct="1">
-              <a:lnSpc>
-                <a:spcPct val="90000"/>
-              </a:lnSpc>
-              <a:spcBef>
-                <a:spcPct val="0"/>
-              </a:spcBef>
-              <a:buNone/>
-              <a:defRPr sz="4000" kern="1200">
-                <a:solidFill>
-                  <a:schemeClr val="bg1"/>
-                </a:solidFill>
-                <a:latin typeface="Arial" panose="020B0604020202020204" pitchFamily="34" charset="0"/>
-                <a:ea typeface="+mj-ea"/>
-                <a:cs typeface="Arial" panose="020B0604020202020204" pitchFamily="34" charset="0"/>
-              </a:defRPr>
-            </a:lvl1pPr>
-          </a:lstStyle>
-          <a:p>
-            <a:r>
-              <a:rPr sz="2400" b="1" i="0">
-                <a:solidFill>
-                  <a:srgbClr val="1A1A1A"/>
-                </a:solidFill>
-                <a:latin typeface="Arial"/>
-              </a:rPr>
-              <a:t>4.2 — Phase 1, Discover — map what the sector has today</a:t>
-            </a:r>
-          </a:p>
-        </p:txBody>
-      </p:sp>
-      <p:pic>
-        <p:nvPicPr>
-          <p:cNvPr id="7" name="Picture 6">
-            <a:extLst>
-              <a:ext uri="{FF2B5EF4-FFF2-40B4-BE49-F238E27FC236}">
-                <a16:creationId xmlns:a16="http://schemas.microsoft.com/office/drawing/2014/main" id="{A2066351-C569-4C4C-A096-308777FCDC32}"/>
-              </a:ext>
-            </a:extLst>
-          </p:cNvPr>
-          <p:cNvPicPr>
-            <a:picLocks noChangeAspect="1"/>
-          </p:cNvPicPr>
-          <p:nvPr/>
-        </p:nvPicPr>
-        <p:blipFill>
-          <a:blip r:embed="rId2">
-            <a:extLst>
-              <a:ext uri="{28A0092B-C50C-407E-A947-70E740481C1C}">
-                <a14:useLocalDpi xmlns:a14="http://schemas.microsoft.com/office/drawing/2010/main" val="0"/>
-              </a:ext>
-            </a:extLst>
-          </a:blip>
-          <a:srcRect t="20219" b="14729"/>
-          <a:stretch>
-            <a:fillRect/>
-          </a:stretch>
-        </p:blipFill>
-        <p:spPr>
-          <a:xfrm>
-            <a:off x="0" y="5620871"/>
-            <a:ext cx="1323975" cy="1218816"/>
-          </a:xfrm>
-          <a:prstGeom prst="rect">
-            <a:avLst/>
-          </a:prstGeom>
-        </p:spPr>
-      </p:pic>
-      <p:sp>
-        <p:nvSpPr>
-          <p:cNvPr id="14" name="Title 9">
-            <a:extLst>
-              <a:ext uri="{FF2B5EF4-FFF2-40B4-BE49-F238E27FC236}">
-                <a16:creationId xmlns:a16="http://schemas.microsoft.com/office/drawing/2014/main" id="{B5087B80-3EE4-1881-0130-ED58CA625092}"/>
-              </a:ext>
-            </a:extLst>
-          </p:cNvPr>
-          <p:cNvSpPr txBox="1">
-            <a:spLocks/>
-          </p:cNvSpPr>
-          <p:nvPr/>
-        </p:nvSpPr>
-        <p:spPr>
-          <a:xfrm>
-            <a:off x="284452" y="2475786"/>
-            <a:ext cx="6382893" cy="953213"/>
-          </a:xfrm>
-          <a:prstGeom prst="rect">
-            <a:avLst/>
-          </a:prstGeom>
-        </p:spPr>
-        <p:txBody>
-          <a:bodyPr anchor="t">
-            <a:noAutofit/>
-          </a:bodyPr>
-          <a:lstStyle>
-            <a:lvl1pPr algn="l" defTabSz="914400" rtl="0" eaLnBrk="1" latinLnBrk="0" hangingPunct="1">
-              <a:lnSpc>
-                <a:spcPct val="90000"/>
-              </a:lnSpc>
-              <a:spcBef>
-                <a:spcPct val="0"/>
-              </a:spcBef>
-              <a:buNone/>
-              <a:defRPr sz="4000" kern="1200">
-                <a:solidFill>
-                  <a:schemeClr val="bg1"/>
-                </a:solidFill>
-                <a:latin typeface="Arial" panose="020B0604020202020204" pitchFamily="34" charset="0"/>
-                <a:ea typeface="+mj-ea"/>
-                <a:cs typeface="Arial" panose="020B0604020202020204" pitchFamily="34" charset="0"/>
-              </a:defRPr>
-            </a:lvl1pPr>
-          </a:lstStyle>
-          <a:p>
-            <a:pPr marL="0" marR="0" lvl="0" indent="0" rtl="0">
-              <a:spcBef>
-                <a:spcPts val="600"/>
-              </a:spcBef>
-              <a:spcAft>
-                <a:spcPts val="0"/>
-              </a:spcAft>
-              <a:buNone/>
-            </a:pPr>
-            <a:r>
-              <a:rPr sz="1300" b="1" i="0">
-                <a:solidFill>
-                  <a:srgbClr val="006E96"/>
-                </a:solidFill>
-                <a:latin typeface="Arial"/>
-              </a:rPr>
-              <a:t>KP1 · Government Enterprise Architecture · Module 4 · Video 4.2</a:t>
-            </a:r>
-          </a:p>
-          <a:p>
-            <a:r>
-              <a:rPr sz="1200" b="0" i="1">
-                <a:solidFill>
-                  <a:srgbClr val="595959"/>
-                </a:solidFill>
-                <a:latin typeface="Arial"/>
-              </a:rPr>
-              <a:t>Discovery produces one deliverable — an honest picture of what the sector has today, with no recommendations yet — signed off as accurate before any analysis begins. Watch it done on Progressa.</a:t>
-            </a:r>
-          </a:p>
-        </p:txBody>
-      </p:sp>
-      <p:sp>
-        <p:nvSpPr>
-          <p:cNvPr id="17" name="Title 9">
-            <a:extLst>
-              <a:ext uri="{FF2B5EF4-FFF2-40B4-BE49-F238E27FC236}">
-                <a16:creationId xmlns:a16="http://schemas.microsoft.com/office/drawing/2014/main" id="{5E8796F7-DD26-D250-5E97-B38B22298E72}"/>
-              </a:ext>
-            </a:extLst>
-          </p:cNvPr>
-          <p:cNvSpPr txBox="1">
-            <a:spLocks/>
-          </p:cNvSpPr>
-          <p:nvPr/>
-        </p:nvSpPr>
-        <p:spPr>
-          <a:xfrm>
-            <a:off x="284452" y="4363897"/>
-            <a:ext cx="6382893" cy="953213"/>
-          </a:xfrm>
-          <a:prstGeom prst="rect">
-            <a:avLst/>
-          </a:prstGeom>
-        </p:spPr>
-        <p:txBody>
-          <a:bodyPr anchor="t">
-            <a:noAutofit/>
-          </a:bodyPr>
-          <a:lstStyle>
-            <a:lvl1pPr algn="l" defTabSz="914400" rtl="0" eaLnBrk="1" latinLnBrk="0" hangingPunct="1">
-              <a:lnSpc>
-                <a:spcPct val="90000"/>
-              </a:lnSpc>
-              <a:spcBef>
-                <a:spcPct val="0"/>
-              </a:spcBef>
-              <a:buNone/>
-              <a:defRPr sz="4000" kern="1200">
-                <a:solidFill>
-                  <a:schemeClr val="bg1"/>
-                </a:solidFill>
-                <a:latin typeface="Arial" panose="020B0604020202020204" pitchFamily="34" charset="0"/>
-                <a:ea typeface="+mj-ea"/>
-                <a:cs typeface="Arial" panose="020B0604020202020204" pitchFamily="34" charset="0"/>
-              </a:defRPr>
-            </a:lvl1pPr>
-          </a:lstStyle>
-          <a:p>
-            <a:pPr marL="0" marR="0" lvl="0" indent="0" rtl="0">
-              <a:spcBef>
-                <a:spcPts val="600"/>
-              </a:spcBef>
-              <a:spcAft>
-                <a:spcPts val="1200"/>
-              </a:spcAft>
-              <a:buNone/>
-            </a:pPr>
-            <a:r>
-              <a:rPr sz="1400" b="1" i="0">
-                <a:solidFill>
-                  <a:srgbClr val="1A1A1A"/>
-                </a:solidFill>
-                <a:latin typeface="Arial"/>
-              </a:rPr>
-              <a:t>Target audience: </a:t>
-            </a:r>
-            <a:r>
-              <a:rPr sz="1400" b="0" i="0">
-                <a:solidFill>
-                  <a:srgbClr val="1A1A1A"/>
-                </a:solidFill>
-                <a:latin typeface="Arial"/>
-              </a:rPr>
-              <a:t>Chief architect · senior architect · sector ICT lead</a:t>
-            </a:r>
-          </a:p>
-        </p:txBody>
-      </p:sp>
-      <p:sp>
-        <p:nvSpPr>
-          <p:cNvPr id="18" name="Rectangle 17"/>
-          <p:cNvSpPr/>
-          <p:nvPr/>
-        </p:nvSpPr>
-        <p:spPr>
-          <a:xfrm>
-            <a:off x="7022592" y="0"/>
-            <a:ext cx="5169103" cy="6858000"/>
-          </a:xfrm>
-          <a:prstGeom prst="rect">
-            <a:avLst/>
-          </a:prstGeom>
-          <a:solidFill>
-            <a:srgbClr val="009CD6"/>
-          </a:solidFill>
-          <a:ln>
-            <a:noFill/>
-          </a:ln>
-          <a:effectLst/>
-        </p:spPr>
-        <p:style>
-          <a:lnRef idx="1">
-            <a:schemeClr val="accent1"/>
-          </a:lnRef>
-          <a:fillRef idx="3">
-            <a:schemeClr val="accent1"/>
-          </a:fillRef>
-          <a:effectRef idx="2">
-            <a:schemeClr val="accent1"/>
-          </a:effectRef>
-          <a:fontRef idx="minor">
-            <a:schemeClr val="lt1"/>
-          </a:fontRef>
-        </p:style>
-        <p:txBody>
-          <a:bodyPr rtlCol="0" anchor="ctr"/>
-          <a:lstStyle/>
-          <a:p>
-            <a:pPr algn="ctr"/>
-          </a:p>
-        </p:txBody>
-      </p:sp>
-      <p:sp>
-        <p:nvSpPr>
-          <p:cNvPr id="19" name="TextBox 18"/>
-          <p:cNvSpPr txBox="1"/>
-          <p:nvPr/>
-        </p:nvSpPr>
-        <p:spPr>
-          <a:xfrm>
-            <a:off x="7452360" y="457200"/>
-            <a:ext cx="4297680" cy="457200"/>
-          </a:xfrm>
-          <a:prstGeom prst="rect">
-            <a:avLst/>
-          </a:prstGeom>
-          <a:noFill/>
-        </p:spPr>
-        <p:txBody>
-          <a:bodyPr wrap="square">
-            <a:spAutoFit/>
-          </a:bodyPr>
-          <a:lstStyle/>
-          <a:p>
-            <a:r>
-              <a:rPr sz="1100" b="1" i="0">
-                <a:solidFill>
-                  <a:srgbClr val="E5F5FB"/>
-                </a:solidFill>
-                <a:latin typeface="Arial"/>
-              </a:rPr>
-              <a:t>THE FIVE PHASES, RUN ON ONE SECTOR</a:t>
-            </a:r>
-          </a:p>
-        </p:txBody>
-      </p:sp>
-      <p:sp>
-        <p:nvSpPr>
-          <p:cNvPr id="20" name="Rounded Rectangle 19"/>
-          <p:cNvSpPr/>
-          <p:nvPr/>
-        </p:nvSpPr>
-        <p:spPr>
-          <a:xfrm>
-            <a:off x="7452360" y="960120"/>
-            <a:ext cx="3840480" cy="658368"/>
-          </a:xfrm>
-          <a:prstGeom prst="roundRect">
-            <a:avLst>
-              <a:gd name="adj" fmla="val 14000"/>
-            </a:avLst>
-          </a:prstGeom>
-          <a:solidFill>
-            <a:srgbClr val="FFFFFF"/>
-          </a:solidFill>
-          <a:ln>
-            <a:noFill/>
-          </a:ln>
-          <a:effectLst/>
-        </p:spPr>
-        <p:style>
-          <a:lnRef idx="1">
-            <a:schemeClr val="accent1"/>
-          </a:lnRef>
-          <a:fillRef idx="3">
-            <a:schemeClr val="accent1"/>
-          </a:fillRef>
-          <a:effectRef idx="2">
-            <a:schemeClr val="accent1"/>
-          </a:effectRef>
-          <a:fontRef idx="minor">
-            <a:schemeClr val="lt1"/>
-          </a:fontRef>
-        </p:style>
-        <p:txBody>
-          <a:bodyPr rtlCol="0" anchor="ctr" lIns="164592" wrap="square"/>
-          <a:lstStyle/>
-          <a:p>
-            <a:pPr algn="ctr"/>
-            <a:r>
-              <a:rPr sz="1500" b="1" i="0">
-                <a:solidFill>
-                  <a:srgbClr val="1A1A1A"/>
-                </a:solidFill>
-                <a:latin typeface="Arial"/>
-              </a:rPr>
-              <a:t>Discover — an honest picture</a:t>
-            </a:r>
-          </a:p>
-        </p:txBody>
-      </p:sp>
-      <p:sp>
-        <p:nvSpPr>
-          <p:cNvPr id="21" name="Rounded Rectangle 20"/>
-          <p:cNvSpPr/>
-          <p:nvPr/>
-        </p:nvSpPr>
-        <p:spPr>
-          <a:xfrm>
-            <a:off x="7452360" y="1892808"/>
-            <a:ext cx="3840480" cy="658368"/>
-          </a:xfrm>
-          <a:prstGeom prst="roundRect">
-            <a:avLst>
-              <a:gd name="adj" fmla="val 14000"/>
-            </a:avLst>
-          </a:prstGeom>
-          <a:solidFill>
-            <a:srgbClr val="FFFFFF"/>
-          </a:solidFill>
-          <a:ln>
-            <a:noFill/>
-          </a:ln>
-          <a:effectLst/>
-        </p:spPr>
-        <p:style>
-          <a:lnRef idx="1">
-            <a:schemeClr val="accent1"/>
-          </a:lnRef>
-          <a:fillRef idx="3">
-            <a:schemeClr val="accent1"/>
-          </a:fillRef>
-          <a:effectRef idx="2">
-            <a:schemeClr val="accent1"/>
-          </a:effectRef>
-          <a:fontRef idx="minor">
-            <a:schemeClr val="lt1"/>
-          </a:fontRef>
-        </p:style>
-        <p:txBody>
-          <a:bodyPr rtlCol="0" anchor="ctr" lIns="164592" wrap="square"/>
-          <a:lstStyle/>
-          <a:p>
-            <a:pPr algn="ctr"/>
-            <a:r>
-              <a:rPr sz="1500" b="1" i="0">
-                <a:solidFill>
-                  <a:srgbClr val="1A1A1A"/>
-                </a:solidFill>
-                <a:latin typeface="Arial"/>
-              </a:rPr>
-              <a:t>Assess — a ranked gap analysis</a:t>
-            </a:r>
-          </a:p>
-        </p:txBody>
-      </p:sp>
-      <p:sp>
-        <p:nvSpPr>
-          <p:cNvPr id="22" name="Rounded Rectangle 21"/>
-          <p:cNvSpPr/>
-          <p:nvPr/>
-        </p:nvSpPr>
-        <p:spPr>
-          <a:xfrm>
-            <a:off x="7452360" y="2825496"/>
-            <a:ext cx="3840480" cy="658368"/>
-          </a:xfrm>
-          <a:prstGeom prst="roundRect">
-            <a:avLst>
-              <a:gd name="adj" fmla="val 14000"/>
-            </a:avLst>
-          </a:prstGeom>
-          <a:solidFill>
-            <a:srgbClr val="FFFFFF"/>
-          </a:solidFill>
-          <a:ln>
-            <a:noFill/>
-          </a:ln>
-          <a:effectLst/>
-        </p:spPr>
-        <p:style>
-          <a:lnRef idx="1">
-            <a:schemeClr val="accent1"/>
-          </a:lnRef>
-          <a:fillRef idx="3">
-            <a:schemeClr val="accent1"/>
-          </a:fillRef>
-          <a:effectRef idx="2">
-            <a:schemeClr val="accent1"/>
-          </a:effectRef>
-          <a:fontRef idx="minor">
-            <a:schemeClr val="lt1"/>
-          </a:fontRef>
-        </p:style>
-        <p:txBody>
-          <a:bodyPr rtlCol="0" anchor="ctr" lIns="164592" wrap="square"/>
-          <a:lstStyle/>
-          <a:p>
-            <a:pPr algn="ctr"/>
-            <a:r>
-              <a:rPr sz="1500" b="1" i="0">
-                <a:solidFill>
-                  <a:srgbClr val="1A1A1A"/>
-                </a:solidFill>
-                <a:latin typeface="Arial"/>
-              </a:rPr>
-              <a:t>Adapt — framework and sourcing</a:t>
-            </a:r>
-          </a:p>
-        </p:txBody>
-      </p:sp>
-      <p:sp>
-        <p:nvSpPr>
-          <p:cNvPr id="23" name="Rounded Rectangle 22"/>
-          <p:cNvSpPr/>
-          <p:nvPr/>
-        </p:nvSpPr>
-        <p:spPr>
-          <a:xfrm>
-            <a:off x="7452360" y="3758184"/>
-            <a:ext cx="3840480" cy="658368"/>
-          </a:xfrm>
-          <a:prstGeom prst="roundRect">
-            <a:avLst>
-              <a:gd name="adj" fmla="val 14000"/>
-            </a:avLst>
-          </a:prstGeom>
-          <a:solidFill>
-            <a:srgbClr val="FFFFFF"/>
-          </a:solidFill>
-          <a:ln>
-            <a:noFill/>
-          </a:ln>
-          <a:effectLst/>
-        </p:spPr>
-        <p:style>
-          <a:lnRef idx="1">
-            <a:schemeClr val="accent1"/>
-          </a:lnRef>
-          <a:fillRef idx="3">
-            <a:schemeClr val="accent1"/>
-          </a:fillRef>
-          <a:effectRef idx="2">
-            <a:schemeClr val="accent1"/>
-          </a:effectRef>
-          <a:fontRef idx="minor">
-            <a:schemeClr val="lt1"/>
-          </a:fontRef>
-        </p:style>
-        <p:txBody>
-          <a:bodyPr rtlCol="0" anchor="ctr" lIns="164592" wrap="square"/>
-          <a:lstStyle/>
-          <a:p>
-            <a:pPr algn="ctr"/>
-            <a:r>
-              <a:rPr sz="1500" b="1" i="0">
-                <a:solidFill>
-                  <a:srgbClr val="1A1A1A"/>
-                </a:solidFill>
-                <a:latin typeface="Arial"/>
-              </a:rPr>
-              <a:t>Plan — the target, then the roadmap</a:t>
-            </a:r>
-          </a:p>
-        </p:txBody>
-      </p:sp>
-      <p:sp>
-        <p:nvSpPr>
-          <p:cNvPr id="24" name="Rounded Rectangle 23"/>
-          <p:cNvSpPr/>
-          <p:nvPr/>
-        </p:nvSpPr>
-        <p:spPr>
-          <a:xfrm>
-            <a:off x="7452360" y="4690872"/>
-            <a:ext cx="3840480" cy="658368"/>
-          </a:xfrm>
-          <a:prstGeom prst="roundRect">
-            <a:avLst>
-              <a:gd name="adj" fmla="val 14000"/>
-            </a:avLst>
-          </a:prstGeom>
-          <a:solidFill>
-            <a:srgbClr val="006E96"/>
-          </a:solidFill>
-          <a:ln>
-            <a:noFill/>
-          </a:ln>
-          <a:effectLst/>
-        </p:spPr>
-        <p:style>
-          <a:lnRef idx="1">
-            <a:schemeClr val="accent1"/>
-          </a:lnRef>
-          <a:fillRef idx="3">
-            <a:schemeClr val="accent1"/>
-          </a:fillRef>
-          <a:effectRef idx="2">
-            <a:schemeClr val="accent1"/>
-          </a:effectRef>
-          <a:fontRef idx="minor">
-            <a:schemeClr val="lt1"/>
-          </a:fontRef>
-        </p:style>
-        <p:txBody>
-          <a:bodyPr rtlCol="0" anchor="ctr" lIns="164592" wrap="square"/>
-          <a:lstStyle/>
-          <a:p>
-            <a:pPr algn="ctr"/>
-            <a:r>
-              <a:rPr sz="1500" b="1" i="0">
-                <a:solidFill>
-                  <a:srgbClr val="FFFFFF"/>
-                </a:solidFill>
-                <a:latin typeface="Arial"/>
-              </a:rPr>
-              <a:t>Execute &amp; Govern — the living EA</a:t>
-            </a:r>
-          </a:p>
-        </p:txBody>
-      </p:sp>
-      <p:sp>
-        <p:nvSpPr>
-          <p:cNvPr id="25" name="TextBox 24"/>
-          <p:cNvSpPr txBox="1"/>
-          <p:nvPr/>
-        </p:nvSpPr>
-        <p:spPr>
-          <a:xfrm>
-            <a:off x="7452360" y="5806440"/>
-            <a:ext cx="4297680" cy="731520"/>
-          </a:xfrm>
-          <a:prstGeom prst="rect">
-            <a:avLst/>
-          </a:prstGeom>
-          <a:noFill/>
-        </p:spPr>
-        <p:txBody>
-          <a:bodyPr wrap="square">
-            <a:spAutoFit/>
-          </a:bodyPr>
-          <a:lstStyle/>
-          <a:p>
-            <a:r>
-              <a:rPr sz="1200" b="0" i="0">
-                <a:solidFill>
-                  <a:srgbClr val="FFFFFF"/>
-                </a:solidFill>
-                <a:latin typeface="Arial"/>
-              </a:rPr>
-              <a:t>5 phases · 4 sign-offs · 6 deliverables · 1 worked sector</a:t>
-            </a:r>
-          </a:p>
-        </p:txBody>
-      </p:sp>
-    </p:spTree>
-    <p:extLst>
-      <p:ext uri="{BB962C8B-B14F-4D97-AF65-F5344CB8AC3E}">
-        <p14:creationId xmlns:p14="http://schemas.microsoft.com/office/powerpoint/2010/main" val="1196800265"/>
-      </p:ext>
-    </p:extLst>
-  </p:cSld>
-  <p:clrMapOvr>
-    <a:masterClrMapping/>
-  </p:clrMapOvr>
-</p:sld>
-</file>
-
-<file path=ppt/slides/slide10.xml><?xml version="1.0" encoding="utf-8"?>
-<p:sld xmlns:a="http://schemas.openxmlformats.org/drawingml/2006/main" xmlns:p="http://schemas.openxmlformats.org/presentationml/2006/main" xmlns:r="http://schemas.openxmlformats.org/officeDocument/2006/relationships">
-  <p:cSld>
-    <p:spTree>
-      <p:nvGrpSpPr>
-        <p:cNvPr id="1" name=""/>
-        <p:cNvGrpSpPr/>
-        <p:nvPr/>
-      </p:nvGrpSpPr>
-      <p:grpSpPr/>
-      <p:sp>
-        <p:nvSpPr>
-          <p:cNvPr id="2" name="TextBox 1"/>
-          <p:cNvSpPr txBox="1"/>
-          <p:nvPr/>
-        </p:nvSpPr>
-        <p:spPr>
-          <a:xfrm>
-            <a:off x="822960" y="822960"/>
-            <a:ext cx="7315200" cy="457200"/>
-          </a:xfrm>
-          <a:prstGeom prst="rect">
-            <a:avLst/>
-          </a:prstGeom>
-          <a:noFill/>
-        </p:spPr>
-        <p:txBody>
-          <a:bodyPr wrap="square">
-            <a:spAutoFit/>
-          </a:bodyPr>
-          <a:lstStyle/>
-          <a:p>
-            <a:r>
-              <a:rPr sz="1200" b="1" i="0">
-                <a:solidFill>
-                  <a:srgbClr val="595959"/>
-                </a:solidFill>
-                <a:latin typeface="Arial"/>
-              </a:rPr>
-              <a:t>KP1 · MODULE 4 · VIDEO 4.2</a:t>
-            </a:r>
-          </a:p>
-        </p:txBody>
-      </p:sp>
-      <p:sp>
-        <p:nvSpPr>
-          <p:cNvPr id="3" name="TextBox 2"/>
-          <p:cNvSpPr txBox="1"/>
-          <p:nvPr/>
-        </p:nvSpPr>
-        <p:spPr>
-          <a:xfrm>
-            <a:off x="822960" y="1828800"/>
-            <a:ext cx="2011680" cy="1097280"/>
-          </a:xfrm>
-          <a:prstGeom prst="rect">
-            <a:avLst/>
-          </a:prstGeom>
-          <a:noFill/>
-        </p:spPr>
-        <p:txBody>
-          <a:bodyPr wrap="square">
-            <a:spAutoFit/>
-          </a:bodyPr>
-          <a:lstStyle/>
-          <a:p>
-            <a:r>
-              <a:rPr sz="6000" b="1" i="0">
-                <a:solidFill>
-                  <a:srgbClr val="009CD6"/>
-                </a:solidFill>
-                <a:latin typeface="Arial"/>
-              </a:rPr>
-              <a:t>4.2</a:t>
-            </a:r>
-          </a:p>
-        </p:txBody>
-      </p:sp>
-      <p:sp>
-        <p:nvSpPr>
-          <p:cNvPr id="4" name="TextBox 3"/>
-          <p:cNvSpPr txBox="1"/>
-          <p:nvPr/>
-        </p:nvSpPr>
-        <p:spPr>
-          <a:xfrm>
-            <a:off x="822960" y="2880360"/>
-            <a:ext cx="9601200" cy="1371600"/>
-          </a:xfrm>
-          <a:prstGeom prst="rect">
-            <a:avLst/>
-          </a:prstGeom>
-          <a:noFill/>
-        </p:spPr>
-        <p:txBody>
-          <a:bodyPr wrap="square">
-            <a:spAutoFit/>
-          </a:bodyPr>
-          <a:lstStyle/>
-          <a:p>
-            <a:r>
-              <a:rPr sz="3400" b="1" i="0">
-                <a:solidFill>
-                  <a:srgbClr val="1A1A1A"/>
-                </a:solidFill>
-                <a:latin typeface="Arial"/>
-              </a:rPr>
-              <a:t>Phase 1, Discover — map what the sector has today</a:t>
-            </a:r>
-          </a:p>
-        </p:txBody>
-      </p:sp>
-      <p:sp>
-        <p:nvSpPr>
-          <p:cNvPr id="5" name="TextBox 4"/>
-          <p:cNvSpPr txBox="1"/>
-          <p:nvPr/>
-        </p:nvSpPr>
-        <p:spPr>
-          <a:xfrm>
-            <a:off x="822960" y="4343400"/>
-            <a:ext cx="9875520" cy="1554480"/>
-          </a:xfrm>
-          <a:prstGeom prst="rect">
-            <a:avLst/>
-          </a:prstGeom>
-          <a:noFill/>
-        </p:spPr>
-        <p:txBody>
-          <a:bodyPr wrap="square">
-            <a:spAutoFit/>
-          </a:bodyPr>
-          <a:lstStyle/>
-          <a:p>
-            <a:r>
-              <a:rPr sz="1700" b="0" i="1">
-                <a:solidFill>
-                  <a:srgbClr val="595959"/>
-                </a:solidFill>
-                <a:latin typeface="Arial"/>
-              </a:rPr>
-              <a:t>Discovery produces one deliverable — an honest picture of what the sector has today, with no recommendations yet — signed off as accurate before any analysis begins. Watch it done on Progressa.</a:t>
-            </a:r>
-          </a:p>
-        </p:txBody>
-      </p:sp>
-      <p:sp>
-        <p:nvSpPr>
-          <p:cNvPr id="6" name="TextBox 5"/>
-          <p:cNvSpPr txBox="1"/>
-          <p:nvPr/>
-        </p:nvSpPr>
-        <p:spPr>
-          <a:xfrm>
-            <a:off x="822960" y="5989320"/>
-            <a:ext cx="7315200" cy="365760"/>
-          </a:xfrm>
-          <a:prstGeom prst="rect">
-            <a:avLst/>
-          </a:prstGeom>
-          <a:noFill/>
-        </p:spPr>
-        <p:txBody>
-          <a:bodyPr wrap="square">
-            <a:spAutoFit/>
-          </a:bodyPr>
-          <a:lstStyle/>
-          <a:p>
-            <a:r>
-              <a:rPr sz="1200" b="0" i="0">
-                <a:solidFill>
-                  <a:srgbClr val="595959"/>
-                </a:solidFill>
-                <a:latin typeface="Arial"/>
-              </a:rPr>
-              <a:t>~4 minutes · standalone video · voice-over on text slides</a:t>
-            </a:r>
-          </a:p>
-        </p:txBody>
-      </p:sp>
-    </p:spTree>
-  </p:cSld>
-  <p:clrMapOvr>
-    <a:masterClrMapping/>
-  </p:clrMapOvr>
-</p:sld>
-</file>
-
 <file path=ppt/slides/slide11.xml><?xml version="1.0" encoding="utf-8"?>
 <p:sld xmlns:a="http://schemas.openxmlformats.org/drawingml/2006/main" xmlns:p="http://schemas.openxmlformats.org/presentationml/2006/main" xmlns:r="http://schemas.openxmlformats.org/officeDocument/2006/relationships">
   <p:cSld>
@@ -12502,58 +11602,14 @@
       <p:grpSpPr/>
       <p:sp>
         <p:nvSpPr>
-          <p:cNvPr id="2" name="Rectangle 1"/>
-          <p:cNvSpPr/>
-          <p:nvPr/>
-        </p:nvSpPr>
-        <p:spPr>
-          <a:xfrm>
-            <a:off x="457200" y="384048"/>
-            <a:ext cx="45720" cy="256032"/>
-          </a:xfrm>
-          <a:prstGeom prst="rect">
-            <a:avLst/>
-          </a:prstGeom>
-          <a:solidFill>
-            <a:srgbClr val="009CD6"/>
-          </a:solidFill>
-          <a:ln>
-            <a:noFill/>
-          </a:ln>
-          <a:effectLst/>
-        </p:spPr>
-        <p:style>
-          <a:lnRef idx="1">
-            <a:schemeClr val="accent1"/>
-          </a:lnRef>
-          <a:fillRef idx="3">
-            <a:schemeClr val="accent1"/>
-          </a:fillRef>
-          <a:effectRef idx="2">
-            <a:schemeClr val="accent1"/>
-          </a:effectRef>
-          <a:fontRef idx="minor">
-            <a:schemeClr val="lt1"/>
-          </a:fontRef>
-        </p:style>
-        <p:txBody>
-          <a:bodyPr rtlCol="0" anchor="ctr"/>
-          <a:lstStyle/>
-          <a:p>
-            <a:pPr algn="ctr"/>
-          </a:p>
-        </p:txBody>
-      </p:sp>
-      <p:sp>
-        <p:nvSpPr>
-          <p:cNvPr id="3" name="TextBox 2"/>
+          <p:cNvPr id="2" name="TextBox 1"/>
           <p:cNvSpPr txBox="1"/>
           <p:nvPr/>
         </p:nvSpPr>
         <p:spPr>
           <a:xfrm>
-            <a:off x="621792" y="274320"/>
-            <a:ext cx="11247120" cy="914400"/>
+            <a:off x="822960" y="822960"/>
+            <a:ext cx="7315200" cy="457200"/>
           </a:xfrm>
           <a:prstGeom prst="rect">
             <a:avLst/>
@@ -12567,66 +11623,81 @@
           <a:lstStyle/>
           <a:p>
             <a:r>
-              <a:rPr sz="2800" b="1" i="0">
+              <a:rPr sz="1200" b="1" i="0">
+                <a:solidFill>
+                  <a:srgbClr val="595959"/>
+                </a:solidFill>
+                <a:latin typeface="Arial"/>
+              </a:rPr>
+              <a:t>KP1 · MODULE 4 · VIDEO 4.2</a:t>
+            </a:r>
+          </a:p>
+        </p:txBody>
+      </p:sp>
+      <p:sp>
+        <p:nvSpPr>
+          <p:cNvPr id="3" name="TextBox 2"/>
+          <p:cNvSpPr txBox="1"/>
+          <p:nvPr/>
+        </p:nvSpPr>
+        <p:spPr>
+          <a:xfrm>
+            <a:off x="822960" y="1828800"/>
+            <a:ext cx="2011680" cy="1097280"/>
+          </a:xfrm>
+          <a:prstGeom prst="rect">
+            <a:avLst/>
+          </a:prstGeom>
+          <a:noFill/>
+        </p:spPr>
+        <p:txBody>
+          <a:bodyPr wrap="square">
+            <a:spAutoFit/>
+          </a:bodyPr>
+          <a:lstStyle/>
+          <a:p>
+            <a:r>
+              <a:rPr sz="6000" b="1" i="0">
+                <a:solidFill>
+                  <a:srgbClr val="009CD6"/>
+                </a:solidFill>
+                <a:latin typeface="Arial"/>
+              </a:rPr>
+              <a:t>4.2</a:t>
+            </a:r>
+          </a:p>
+        </p:txBody>
+      </p:sp>
+      <p:sp>
+        <p:nvSpPr>
+          <p:cNvPr id="4" name="TextBox 3"/>
+          <p:cNvSpPr txBox="1"/>
+          <p:nvPr/>
+        </p:nvSpPr>
+        <p:spPr>
+          <a:xfrm>
+            <a:off x="822960" y="2880360"/>
+            <a:ext cx="9601200" cy="1371600"/>
+          </a:xfrm>
+          <a:prstGeom prst="rect">
+            <a:avLst/>
+          </a:prstGeom>
+          <a:noFill/>
+        </p:spPr>
+        <p:txBody>
+          <a:bodyPr wrap="square">
+            <a:spAutoFit/>
+          </a:bodyPr>
+          <a:lstStyle/>
+          <a:p>
+            <a:r>
+              <a:rPr sz="3400" b="1" i="0">
                 <a:solidFill>
                   <a:srgbClr val="1A1A1A"/>
                 </a:solidFill>
                 <a:latin typeface="Arial"/>
               </a:rPr>
-              <a:t>Discovery collects five things — and judges none of them</a:t>
-            </a:r>
-          </a:p>
-        </p:txBody>
-      </p:sp>
-      <p:sp>
-        <p:nvSpPr>
-          <p:cNvPr id="4" name="Oval 3"/>
-          <p:cNvSpPr/>
-          <p:nvPr/>
-        </p:nvSpPr>
-        <p:spPr>
-          <a:xfrm>
-            <a:off x="621792" y="1508760"/>
-            <a:ext cx="310896" cy="310896"/>
-          </a:xfrm>
-          <a:prstGeom prst="ellipse">
-            <a:avLst/>
-          </a:prstGeom>
-          <a:solidFill>
-            <a:srgbClr val="009CD6"/>
-          </a:solidFill>
-          <a:ln>
-            <a:noFill/>
-          </a:ln>
-          <a:effectLst/>
-        </p:spPr>
-        <p:style>
-          <a:lnRef idx="1">
-            <a:schemeClr val="accent1"/>
-          </a:lnRef>
-          <a:fillRef idx="3">
-            <a:schemeClr val="accent1"/>
-          </a:fillRef>
-          <a:effectRef idx="2">
-            <a:schemeClr val="accent1"/>
-          </a:effectRef>
-          <a:fontRef idx="minor">
-            <a:schemeClr val="lt1"/>
-          </a:fontRef>
-        </p:style>
-        <p:txBody>
-          <a:bodyPr rtlCol="0" anchor="ctr" lIns="0" rIns="0" tIns="0" bIns="0" wrap="square"/>
-          <a:lstStyle/>
-          <a:p>
-            <a:pPr algn="ctr"/>
-            <a:r>
-              <a:rPr sz="1300" b="1" i="0">
-                <a:solidFill>
-                  <a:srgbClr val="FFFFFF"/>
-                </a:solidFill>
-                <a:latin typeface="Arial"/>
-              </a:rPr>
-              <a:t>1</a:t>
+              <a:t>Phase 1, Discover — map what the sector has today</a:t>
             </a:r>
           </a:p>
         </p:txBody>
@@ -12639,8 +11710,8 @@
         </p:nvSpPr>
         <p:spPr>
           <a:xfrm>
-            <a:off x="1115568" y="1463040"/>
-            <a:ext cx="10527487" cy="813815"/>
+            <a:off x="822960" y="4343400"/>
+            <a:ext cx="9875520" cy="1554480"/>
           </a:xfrm>
           <a:prstGeom prst="rect">
             <a:avLst/>
@@ -12653,146 +11724,28 @@
           </a:bodyPr>
           <a:lstStyle/>
           <a:p>
-            <a:pPr>
-              <a:spcAft>
-                <a:spcPts val="300"/>
-              </a:spcAft>
-            </a:pPr>
-            <a:r>
-              <a:rPr sz="1900" b="1" i="0">
-                <a:solidFill>
-                  <a:srgbClr val="1A1A1A"/>
-                </a:solidFill>
-                <a:latin typeface="Arial"/>
-              </a:rPr>
-              <a:t>Strategies in force</a:t>
-            </a:r>
-          </a:p>
-          <a:p>
-            <a:pPr>
-              <a:spcAft>
-                <a:spcPts val="300"/>
-              </a:spcAft>
-            </a:pPr>
-            <a:r>
-              <a:rPr sz="1550" b="0" i="0">
+            <a:r>
+              <a:rPr sz="1700" b="0" i="1">
                 <a:solidFill>
                   <a:srgbClr val="595959"/>
                 </a:solidFill>
                 <a:latin typeface="Arial"/>
               </a:rPr>
-              <a:t>The national digital strategy; the education sector plan.</a:t>
-            </a:r>
-          </a:p>
-        </p:txBody>
-      </p:sp>
-      <p:sp>
-        <p:nvSpPr>
-          <p:cNvPr id="6" name="Rectangle 5"/>
-          <p:cNvSpPr/>
-          <p:nvPr/>
-        </p:nvSpPr>
-        <p:spPr>
-          <a:xfrm>
-            <a:off x="621792" y="2281428"/>
-            <a:ext cx="10881360" cy="12700"/>
-          </a:xfrm>
-          <a:prstGeom prst="rect">
-            <a:avLst/>
-          </a:prstGeom>
-          <a:solidFill>
-            <a:srgbClr val="DDECF4"/>
-          </a:solidFill>
-          <a:ln>
-            <a:noFill/>
-          </a:ln>
-          <a:effectLst/>
-        </p:spPr>
-        <p:style>
-          <a:lnRef idx="1">
-            <a:schemeClr val="accent1"/>
-          </a:lnRef>
-          <a:fillRef idx="3">
-            <a:schemeClr val="accent1"/>
-          </a:fillRef>
-          <a:effectRef idx="2">
-            <a:schemeClr val="accent1"/>
-          </a:effectRef>
-          <a:fontRef idx="minor">
-            <a:schemeClr val="lt1"/>
-          </a:fontRef>
-        </p:style>
-        <p:txBody>
-          <a:bodyPr rtlCol="0" anchor="ctr"/>
-          <a:lstStyle/>
-          <a:p>
-            <a:pPr algn="ctr"/>
-          </a:p>
-        </p:txBody>
-      </p:sp>
-      <p:sp>
-        <p:nvSpPr>
-          <p:cNvPr id="7" name="Oval 6"/>
-          <p:cNvSpPr/>
-          <p:nvPr/>
-        </p:nvSpPr>
-        <p:spPr>
-          <a:xfrm>
-            <a:off x="621792" y="2368296"/>
-            <a:ext cx="310896" cy="310896"/>
-          </a:xfrm>
-          <a:prstGeom prst="ellipse">
-            <a:avLst/>
-          </a:prstGeom>
-          <a:solidFill>
-            <a:srgbClr val="009CD6"/>
-          </a:solidFill>
-          <a:ln>
-            <a:noFill/>
-          </a:ln>
-          <a:effectLst/>
-        </p:spPr>
-        <p:style>
-          <a:lnRef idx="1">
-            <a:schemeClr val="accent1"/>
-          </a:lnRef>
-          <a:fillRef idx="3">
-            <a:schemeClr val="accent1"/>
-          </a:fillRef>
-          <a:effectRef idx="2">
-            <a:schemeClr val="accent1"/>
-          </a:effectRef>
-          <a:fontRef idx="minor">
-            <a:schemeClr val="lt1"/>
-          </a:fontRef>
-        </p:style>
-        <p:txBody>
-          <a:bodyPr rtlCol="0" anchor="ctr" lIns="0" rIns="0" tIns="0" bIns="0" wrap="square"/>
-          <a:lstStyle/>
-          <a:p>
-            <a:pPr algn="ctr"/>
-            <a:r>
-              <a:rPr sz="1300" b="1" i="0">
-                <a:solidFill>
-                  <a:srgbClr val="FFFFFF"/>
-                </a:solidFill>
-                <a:latin typeface="Arial"/>
-              </a:rPr>
-              <a:t>2</a:t>
-            </a:r>
-          </a:p>
-        </p:txBody>
-      </p:sp>
-      <p:sp>
-        <p:nvSpPr>
-          <p:cNvPr id="8" name="TextBox 7"/>
+              <a:t>Discovery produces one deliverable — an honest picture of what the sector has today, with no recommendations yet — signed off as accurate before any analysis begins. Watch it done on Progressa.</a:t>
+            </a:r>
+          </a:p>
+        </p:txBody>
+      </p:sp>
+      <p:sp>
+        <p:nvSpPr>
+          <p:cNvPr id="6" name="TextBox 5"/>
           <p:cNvSpPr txBox="1"/>
           <p:nvPr/>
         </p:nvSpPr>
         <p:spPr>
           <a:xfrm>
-            <a:off x="1115568" y="2322576"/>
-            <a:ext cx="10527487" cy="813815"/>
+            <a:off x="822960" y="5989320"/>
+            <a:ext cx="7315200" cy="365760"/>
           </a:xfrm>
           <a:prstGeom prst="rect">
             <a:avLst/>
@@ -12805,559 +11758,14 @@
           </a:bodyPr>
           <a:lstStyle/>
           <a:p>
-            <a:pPr>
-              <a:spcAft>
-                <a:spcPts val="300"/>
-              </a:spcAft>
-            </a:pPr>
-            <a:r>
-              <a:rPr sz="1900" b="1" i="0">
-                <a:solidFill>
-                  <a:srgbClr val="1A1A1A"/>
-                </a:solidFill>
-                <a:latin typeface="Arial"/>
-              </a:rPr>
-              <a:t>Systems that exist</a:t>
-            </a:r>
-          </a:p>
-          <a:p>
-            <a:pPr>
-              <a:spcAft>
-                <a:spcPts val="300"/>
-              </a:spcAft>
-            </a:pPr>
-            <a:r>
-              <a:rPr sz="1550" b="0" i="0">
+            <a:r>
+              <a:rPr sz="1200" b="0" i="0">
                 <a:solidFill>
                   <a:srgbClr val="595959"/>
                 </a:solidFill>
                 <a:latin typeface="Arial"/>
               </a:rPr>
-              <a:t>School census, exam management, the social grant system.</a:t>
-            </a:r>
-          </a:p>
-        </p:txBody>
-      </p:sp>
-      <p:sp>
-        <p:nvSpPr>
-          <p:cNvPr id="9" name="Rectangle 8"/>
-          <p:cNvSpPr/>
-          <p:nvPr/>
-        </p:nvSpPr>
-        <p:spPr>
-          <a:xfrm>
-            <a:off x="621792" y="3140963"/>
-            <a:ext cx="10881360" cy="12700"/>
-          </a:xfrm>
-          <a:prstGeom prst="rect">
-            <a:avLst/>
-          </a:prstGeom>
-          <a:solidFill>
-            <a:srgbClr val="DDECF4"/>
-          </a:solidFill>
-          <a:ln>
-            <a:noFill/>
-          </a:ln>
-          <a:effectLst/>
-        </p:spPr>
-        <p:style>
-          <a:lnRef idx="1">
-            <a:schemeClr val="accent1"/>
-          </a:lnRef>
-          <a:fillRef idx="3">
-            <a:schemeClr val="accent1"/>
-          </a:fillRef>
-          <a:effectRef idx="2">
-            <a:schemeClr val="accent1"/>
-          </a:effectRef>
-          <a:fontRef idx="minor">
-            <a:schemeClr val="lt1"/>
-          </a:fontRef>
-        </p:style>
-        <p:txBody>
-          <a:bodyPr rtlCol="0" anchor="ctr"/>
-          <a:lstStyle/>
-          <a:p>
-            <a:pPr algn="ctr"/>
-          </a:p>
-        </p:txBody>
-      </p:sp>
-      <p:sp>
-        <p:nvSpPr>
-          <p:cNvPr id="10" name="Oval 9"/>
-          <p:cNvSpPr/>
-          <p:nvPr/>
-        </p:nvSpPr>
-        <p:spPr>
-          <a:xfrm>
-            <a:off x="621792" y="3227831"/>
-            <a:ext cx="310896" cy="310896"/>
-          </a:xfrm>
-          <a:prstGeom prst="ellipse">
-            <a:avLst/>
-          </a:prstGeom>
-          <a:solidFill>
-            <a:srgbClr val="009CD6"/>
-          </a:solidFill>
-          <a:ln>
-            <a:noFill/>
-          </a:ln>
-          <a:effectLst/>
-        </p:spPr>
-        <p:style>
-          <a:lnRef idx="1">
-            <a:schemeClr val="accent1"/>
-          </a:lnRef>
-          <a:fillRef idx="3">
-            <a:schemeClr val="accent1"/>
-          </a:fillRef>
-          <a:effectRef idx="2">
-            <a:schemeClr val="accent1"/>
-          </a:effectRef>
-          <a:fontRef idx="minor">
-            <a:schemeClr val="lt1"/>
-          </a:fontRef>
-        </p:style>
-        <p:txBody>
-          <a:bodyPr rtlCol="0" anchor="ctr" lIns="0" rIns="0" tIns="0" bIns="0" wrap="square"/>
-          <a:lstStyle/>
-          <a:p>
-            <a:pPr algn="ctr"/>
-            <a:r>
-              <a:rPr sz="1300" b="1" i="0">
-                <a:solidFill>
-                  <a:srgbClr val="FFFFFF"/>
-                </a:solidFill>
-                <a:latin typeface="Arial"/>
-              </a:rPr>
-              <a:t>3</a:t>
-            </a:r>
-          </a:p>
-        </p:txBody>
-      </p:sp>
-      <p:sp>
-        <p:nvSpPr>
-          <p:cNvPr id="11" name="TextBox 10"/>
-          <p:cNvSpPr txBox="1"/>
-          <p:nvPr/>
-        </p:nvSpPr>
-        <p:spPr>
-          <a:xfrm>
-            <a:off x="1115568" y="3182111"/>
-            <a:ext cx="10527487" cy="813815"/>
-          </a:xfrm>
-          <a:prstGeom prst="rect">
-            <a:avLst/>
-          </a:prstGeom>
-          <a:noFill/>
-        </p:spPr>
-        <p:txBody>
-          <a:bodyPr wrap="square">
-            <a:spAutoFit/>
-          </a:bodyPr>
-          <a:lstStyle/>
-          <a:p>
-            <a:pPr>
-              <a:spcAft>
-                <a:spcPts val="300"/>
-              </a:spcAft>
-            </a:pPr>
-            <a:r>
-              <a:rPr sz="1900" b="1" i="0">
-                <a:solidFill>
-                  <a:srgbClr val="1A1A1A"/>
-                </a:solidFill>
-                <a:latin typeface="Arial"/>
-              </a:rPr>
-              <a:t>Registries and who owns them</a:t>
-            </a:r>
-          </a:p>
-          <a:p>
-            <a:pPr>
-              <a:spcAft>
-                <a:spcPts val="300"/>
-              </a:spcAft>
-            </a:pPr>
-            <a:r>
-              <a:rPr sz="1550" b="0" i="0">
-                <a:solidFill>
-                  <a:srgbClr val="595959"/>
-                </a:solidFill>
-                <a:latin typeface="Arial"/>
-              </a:rPr>
-              <a:t>The learner lists; the identity register.</a:t>
-            </a:r>
-          </a:p>
-        </p:txBody>
-      </p:sp>
-      <p:sp>
-        <p:nvSpPr>
-          <p:cNvPr id="12" name="Rectangle 11"/>
-          <p:cNvSpPr/>
-          <p:nvPr/>
-        </p:nvSpPr>
-        <p:spPr>
-          <a:xfrm>
-            <a:off x="621792" y="4000500"/>
-            <a:ext cx="10881360" cy="12700"/>
-          </a:xfrm>
-          <a:prstGeom prst="rect">
-            <a:avLst/>
-          </a:prstGeom>
-          <a:solidFill>
-            <a:srgbClr val="DDECF4"/>
-          </a:solidFill>
-          <a:ln>
-            <a:noFill/>
-          </a:ln>
-          <a:effectLst/>
-        </p:spPr>
-        <p:style>
-          <a:lnRef idx="1">
-            <a:schemeClr val="accent1"/>
-          </a:lnRef>
-          <a:fillRef idx="3">
-            <a:schemeClr val="accent1"/>
-          </a:fillRef>
-          <a:effectRef idx="2">
-            <a:schemeClr val="accent1"/>
-          </a:effectRef>
-          <a:fontRef idx="minor">
-            <a:schemeClr val="lt1"/>
-          </a:fontRef>
-        </p:style>
-        <p:txBody>
-          <a:bodyPr rtlCol="0" anchor="ctr"/>
-          <a:lstStyle/>
-          <a:p>
-            <a:pPr algn="ctr"/>
-          </a:p>
-        </p:txBody>
-      </p:sp>
-      <p:sp>
-        <p:nvSpPr>
-          <p:cNvPr id="13" name="Oval 12"/>
-          <p:cNvSpPr/>
-          <p:nvPr/>
-        </p:nvSpPr>
-        <p:spPr>
-          <a:xfrm>
-            <a:off x="621792" y="4087368"/>
-            <a:ext cx="310896" cy="310896"/>
-          </a:xfrm>
-          <a:prstGeom prst="ellipse">
-            <a:avLst/>
-          </a:prstGeom>
-          <a:solidFill>
-            <a:srgbClr val="009CD6"/>
-          </a:solidFill>
-          <a:ln>
-            <a:noFill/>
-          </a:ln>
-          <a:effectLst/>
-        </p:spPr>
-        <p:style>
-          <a:lnRef idx="1">
-            <a:schemeClr val="accent1"/>
-          </a:lnRef>
-          <a:fillRef idx="3">
-            <a:schemeClr val="accent1"/>
-          </a:fillRef>
-          <a:effectRef idx="2">
-            <a:schemeClr val="accent1"/>
-          </a:effectRef>
-          <a:fontRef idx="minor">
-            <a:schemeClr val="lt1"/>
-          </a:fontRef>
-        </p:style>
-        <p:txBody>
-          <a:bodyPr rtlCol="0" anchor="ctr" lIns="0" rIns="0" tIns="0" bIns="0" wrap="square"/>
-          <a:lstStyle/>
-          <a:p>
-            <a:pPr algn="ctr"/>
-            <a:r>
-              <a:rPr sz="1300" b="1" i="0">
-                <a:solidFill>
-                  <a:srgbClr val="FFFFFF"/>
-                </a:solidFill>
-                <a:latin typeface="Arial"/>
-              </a:rPr>
-              <a:t>4</a:t>
-            </a:r>
-          </a:p>
-        </p:txBody>
-      </p:sp>
-      <p:sp>
-        <p:nvSpPr>
-          <p:cNvPr id="14" name="TextBox 13"/>
-          <p:cNvSpPr txBox="1"/>
-          <p:nvPr/>
-        </p:nvSpPr>
-        <p:spPr>
-          <a:xfrm>
-            <a:off x="1115568" y="4041648"/>
-            <a:ext cx="10527487" cy="813815"/>
-          </a:xfrm>
-          <a:prstGeom prst="rect">
-            <a:avLst/>
-          </a:prstGeom>
-          <a:noFill/>
-        </p:spPr>
-        <p:txBody>
-          <a:bodyPr wrap="square">
-            <a:spAutoFit/>
-          </a:bodyPr>
-          <a:lstStyle/>
-          <a:p>
-            <a:pPr>
-              <a:spcAft>
-                <a:spcPts val="300"/>
-              </a:spcAft>
-            </a:pPr>
-            <a:r>
-              <a:rPr sz="1900" b="1" i="0">
-                <a:solidFill>
-                  <a:srgbClr val="1A1A1A"/>
-                </a:solidFill>
-                <a:latin typeface="Arial"/>
-              </a:rPr>
-              <a:t>Stakeholders</a:t>
-            </a:r>
-          </a:p>
-          <a:p>
-            <a:pPr>
-              <a:spcAft>
-                <a:spcPts val="300"/>
-              </a:spcAft>
-            </a:pPr>
-            <a:r>
-              <a:rPr sz="1550" b="0" i="0">
-                <a:solidFill>
-                  <a:srgbClr val="595959"/>
-                </a:solidFill>
-                <a:latin typeface="Arial"/>
-              </a:rPr>
-              <a:t>The ministry, the authorities, the donors funding each piece.</a:t>
-            </a:r>
-          </a:p>
-        </p:txBody>
-      </p:sp>
-      <p:sp>
-        <p:nvSpPr>
-          <p:cNvPr id="15" name="Rectangle 14"/>
-          <p:cNvSpPr/>
-          <p:nvPr/>
-        </p:nvSpPr>
-        <p:spPr>
-          <a:xfrm>
-            <a:off x="621792" y="4860036"/>
-            <a:ext cx="10881360" cy="12700"/>
-          </a:xfrm>
-          <a:prstGeom prst="rect">
-            <a:avLst/>
-          </a:prstGeom>
-          <a:solidFill>
-            <a:srgbClr val="DDECF4"/>
-          </a:solidFill>
-          <a:ln>
-            <a:noFill/>
-          </a:ln>
-          <a:effectLst/>
-        </p:spPr>
-        <p:style>
-          <a:lnRef idx="1">
-            <a:schemeClr val="accent1"/>
-          </a:lnRef>
-          <a:fillRef idx="3">
-            <a:schemeClr val="accent1"/>
-          </a:fillRef>
-          <a:effectRef idx="2">
-            <a:schemeClr val="accent1"/>
-          </a:effectRef>
-          <a:fontRef idx="minor">
-            <a:schemeClr val="lt1"/>
-          </a:fontRef>
-        </p:style>
-        <p:txBody>
-          <a:bodyPr rtlCol="0" anchor="ctr"/>
-          <a:lstStyle/>
-          <a:p>
-            <a:pPr algn="ctr"/>
-          </a:p>
-        </p:txBody>
-      </p:sp>
-      <p:sp>
-        <p:nvSpPr>
-          <p:cNvPr id="16" name="Oval 15"/>
-          <p:cNvSpPr/>
-          <p:nvPr/>
-        </p:nvSpPr>
-        <p:spPr>
-          <a:xfrm>
-            <a:off x="621792" y="4946903"/>
-            <a:ext cx="310896" cy="310896"/>
-          </a:xfrm>
-          <a:prstGeom prst="ellipse">
-            <a:avLst/>
-          </a:prstGeom>
-          <a:solidFill>
-            <a:srgbClr val="009CD6"/>
-          </a:solidFill>
-          <a:ln>
-            <a:noFill/>
-          </a:ln>
-          <a:effectLst/>
-        </p:spPr>
-        <p:style>
-          <a:lnRef idx="1">
-            <a:schemeClr val="accent1"/>
-          </a:lnRef>
-          <a:fillRef idx="3">
-            <a:schemeClr val="accent1"/>
-          </a:fillRef>
-          <a:effectRef idx="2">
-            <a:schemeClr val="accent1"/>
-          </a:effectRef>
-          <a:fontRef idx="minor">
-            <a:schemeClr val="lt1"/>
-          </a:fontRef>
-        </p:style>
-        <p:txBody>
-          <a:bodyPr rtlCol="0" anchor="ctr" lIns="0" rIns="0" tIns="0" bIns="0" wrap="square"/>
-          <a:lstStyle/>
-          <a:p>
-            <a:pPr algn="ctr"/>
-            <a:r>
-              <a:rPr sz="1300" b="1" i="0">
-                <a:solidFill>
-                  <a:srgbClr val="FFFFFF"/>
-                </a:solidFill>
-                <a:latin typeface="Arial"/>
-              </a:rPr>
-              <a:t>5</a:t>
-            </a:r>
-          </a:p>
-        </p:txBody>
-      </p:sp>
-      <p:sp>
-        <p:nvSpPr>
-          <p:cNvPr id="17" name="TextBox 16"/>
-          <p:cNvSpPr txBox="1"/>
-          <p:nvPr/>
-        </p:nvSpPr>
-        <p:spPr>
-          <a:xfrm>
-            <a:off x="1115568" y="4901183"/>
-            <a:ext cx="10527487" cy="813815"/>
-          </a:xfrm>
-          <a:prstGeom prst="rect">
-            <a:avLst/>
-          </a:prstGeom>
-          <a:noFill/>
-        </p:spPr>
-        <p:txBody>
-          <a:bodyPr wrap="square">
-            <a:spAutoFit/>
-          </a:bodyPr>
-          <a:lstStyle/>
-          <a:p>
-            <a:pPr>
-              <a:spcAft>
-                <a:spcPts val="300"/>
-              </a:spcAft>
-            </a:pPr>
-            <a:r>
-              <a:rPr sz="1900" b="1" i="0">
-                <a:solidFill>
-                  <a:srgbClr val="1A1A1A"/>
-                </a:solidFill>
-                <a:latin typeface="Arial"/>
-              </a:rPr>
-              <a:t>The legal framework</a:t>
-            </a:r>
-          </a:p>
-          <a:p>
-            <a:pPr>
-              <a:spcAft>
-                <a:spcPts val="300"/>
-              </a:spcAft>
-            </a:pPr>
-            <a:r>
-              <a:rPr sz="1550" b="0" i="0">
-                <a:solidFill>
-                  <a:srgbClr val="595959"/>
-                </a:solidFill>
-                <a:latin typeface="Arial"/>
-              </a:rPr>
-              <a:t>The data-protection act; the mandate of each body.</a:t>
-            </a:r>
-          </a:p>
-        </p:txBody>
-      </p:sp>
-      <p:sp>
-        <p:nvSpPr>
-          <p:cNvPr id="18" name="TextBox 17"/>
-          <p:cNvSpPr txBox="1"/>
-          <p:nvPr/>
-        </p:nvSpPr>
-        <p:spPr>
-          <a:xfrm>
-            <a:off x="658368" y="5870448"/>
-            <a:ext cx="10881360" cy="548640"/>
-          </a:xfrm>
-          <a:prstGeom prst="rect">
-            <a:avLst/>
-          </a:prstGeom>
-          <a:noFill/>
-        </p:spPr>
-        <p:txBody>
-          <a:bodyPr wrap="square">
-            <a:spAutoFit/>
-          </a:bodyPr>
-          <a:lstStyle/>
-          <a:p>
-            <a:r>
-              <a:rPr sz="1550" b="1" i="0">
-                <a:solidFill>
-                  <a:srgbClr val="006E96"/>
-                </a:solidFill>
-                <a:latin typeface="Arial"/>
-              </a:rPr>
-              <a:t>You gather. You do not judge.</a:t>
-            </a:r>
-          </a:p>
-        </p:txBody>
-      </p:sp>
-      <p:sp>
-        <p:nvSpPr>
-          <p:cNvPr id="19" name="TextBox 18"/>
-          <p:cNvSpPr txBox="1"/>
-          <p:nvPr/>
-        </p:nvSpPr>
-        <p:spPr>
-          <a:xfrm>
-            <a:off x="457200" y="6473952"/>
-            <a:ext cx="7772400" cy="292608"/>
-          </a:xfrm>
-          <a:prstGeom prst="rect">
-            <a:avLst/>
-          </a:prstGeom>
-          <a:noFill/>
-        </p:spPr>
-        <p:txBody>
-          <a:bodyPr wrap="square">
-            <a:spAutoFit/>
-          </a:bodyPr>
-          <a:lstStyle/>
-          <a:p>
-            <a:r>
-              <a:rPr sz="900" b="0" i="0">
-                <a:solidFill>
-                  <a:srgbClr val="595959"/>
-                </a:solidFill>
-                <a:latin typeface="Arial"/>
-              </a:rPr>
-              <a:t>4.2 · Phase 1, Discover — map what the sector has today</a:t>
+              <a:t>~4 minutes · standalone video · voice-over on text slides</a:t>
             </a:r>
           </a:p>
         </p:txBody>
@@ -13382,58 +11790,14 @@
       <p:grpSpPr/>
       <p:sp>
         <p:nvSpPr>
-          <p:cNvPr id="2" name="Rectangle 1"/>
-          <p:cNvSpPr/>
-          <p:nvPr/>
-        </p:nvSpPr>
-        <p:spPr>
-          <a:xfrm>
-            <a:off x="457200" y="384048"/>
-            <a:ext cx="45720" cy="256032"/>
-          </a:xfrm>
-          <a:prstGeom prst="rect">
-            <a:avLst/>
-          </a:prstGeom>
-          <a:solidFill>
-            <a:srgbClr val="009CD6"/>
-          </a:solidFill>
-          <a:ln>
-            <a:noFill/>
-          </a:ln>
-          <a:effectLst/>
-        </p:spPr>
-        <p:style>
-          <a:lnRef idx="1">
-            <a:schemeClr val="accent1"/>
-          </a:lnRef>
-          <a:fillRef idx="3">
-            <a:schemeClr val="accent1"/>
-          </a:fillRef>
-          <a:effectRef idx="2">
-            <a:schemeClr val="accent1"/>
-          </a:effectRef>
-          <a:fontRef idx="minor">
-            <a:schemeClr val="lt1"/>
-          </a:fontRef>
-        </p:style>
-        <p:txBody>
-          <a:bodyPr rtlCol="0" anchor="ctr"/>
-          <a:lstStyle/>
-          <a:p>
-            <a:pPr algn="ctr"/>
-          </a:p>
-        </p:txBody>
-      </p:sp>
-      <p:sp>
-        <p:nvSpPr>
-          <p:cNvPr id="3" name="TextBox 2"/>
+          <p:cNvPr id="2" name="TextBox 1"/>
           <p:cNvSpPr txBox="1"/>
           <p:nvPr/>
         </p:nvSpPr>
         <p:spPr>
           <a:xfrm>
-            <a:off x="621792" y="274320"/>
-            <a:ext cx="11247120" cy="914400"/>
+            <a:off x="1005840" y="1325880"/>
+            <a:ext cx="5486400" cy="365760"/>
           </a:xfrm>
           <a:prstGeom prst="rect">
             <a:avLst/>
@@ -13447,13 +11811,47 @@
           <a:lstStyle/>
           <a:p>
             <a:r>
-              <a:rPr sz="2800" b="1" i="0">
+              <a:rPr sz="1200" b="1" i="0">
+                <a:solidFill>
+                  <a:srgbClr val="006E96"/>
+                </a:solidFill>
+                <a:latin typeface="Arial"/>
+              </a:rPr>
+              <a:t>WHERE WE START</a:t>
+            </a:r>
+          </a:p>
+        </p:txBody>
+      </p:sp>
+      <p:sp>
+        <p:nvSpPr>
+          <p:cNvPr id="3" name="TextBox 2"/>
+          <p:cNvSpPr txBox="1"/>
+          <p:nvPr/>
+        </p:nvSpPr>
+        <p:spPr>
+          <a:xfrm>
+            <a:off x="1005840" y="1783080"/>
+            <a:ext cx="10149840" cy="1737360"/>
+          </a:xfrm>
+          <a:prstGeom prst="rect">
+            <a:avLst/>
+          </a:prstGeom>
+          <a:noFill/>
+        </p:spPr>
+        <p:txBody>
+          <a:bodyPr wrap="square">
+            <a:spAutoFit/>
+          </a:bodyPr>
+          <a:lstStyle/>
+          <a:p>
+            <a:r>
+              <a:rPr sz="3000" b="1" i="0">
                 <a:solidFill>
                   <a:srgbClr val="1A1A1A"/>
                 </a:solidFill>
                 <a:latin typeface="Arial"/>
               </a:rPr>
-              <a:t>Describe without recommending — the judgement belongs to the next phase</a:t>
+              <a:t>Phase 1 — Discover. One question: what exists today?</a:t>
             </a:r>
           </a:p>
         </p:txBody>
@@ -13466,8 +11864,8 @@
         </p:nvSpPr>
         <p:spPr>
           <a:xfrm>
-            <a:off x="658368" y="1600200"/>
-            <a:ext cx="10881360" cy="2651760"/>
+            <a:off x="1005840" y="3611880"/>
+            <a:ext cx="10149840" cy="2377440"/>
           </a:xfrm>
           <a:prstGeom prst="rect">
             <a:avLst/>
@@ -13482,125 +11880,56 @@
           <a:p>
             <a:pPr>
               <a:spcAft>
-                <a:spcPts val="1200"/>
+                <a:spcPts val="800"/>
               </a:spcAft>
             </a:pPr>
             <a:r>
-              <a:rPr sz="2000" b="0" i="0">
+              <a:rPr sz="1700" b="0" i="0">
                 <a:solidFill>
-                  <a:srgbClr val="1A1A1A"/>
+                  <a:srgbClr val="595959"/>
                 </a:solidFill>
                 <a:latin typeface="Arial"/>
               </a:rPr>
-              <a:t>When your architects find that the Examination Authority keeps its own learner list, the urge is to write "this should be fixed". Resist it.</a:t>
+              <a:t>Not what is wrong — that comes later.</a:t>
             </a:r>
           </a:p>
           <a:p>
             <a:pPr>
               <a:spcAft>
-                <a:spcPts val="1200"/>
+                <a:spcPts val="800"/>
               </a:spcAft>
             </a:pPr>
             <a:r>
-              <a:rPr sz="2000" b="0" i="0">
+              <a:rPr sz="1700" b="0" i="0">
                 <a:solidFill>
-                  <a:srgbClr val="1A1A1A"/>
+                  <a:srgbClr val="595959"/>
                 </a:solidFill>
                 <a:latin typeface="Arial"/>
               </a:rPr>
-              <a:t>Discovery records that the list exists, who owns it, how many learners it holds. Whether it is a problem, how severe, what priority — that belongs to Assess. Mixing them biases the assessment before you have the full picture.</a:t>
-            </a:r>
-          </a:p>
-        </p:txBody>
-      </p:sp>
-      <p:sp>
-        <p:nvSpPr>
-          <p:cNvPr id="5" name="Rounded Rectangle 4"/>
-          <p:cNvSpPr/>
-          <p:nvPr/>
-        </p:nvSpPr>
-        <p:spPr>
-          <a:xfrm>
-            <a:off x="658368" y="4434840"/>
-            <a:ext cx="10881360" cy="1325880"/>
-          </a:xfrm>
-          <a:prstGeom prst="roundRect">
-            <a:avLst>
-              <a:gd name="adj" fmla="val 4500"/>
-            </a:avLst>
-          </a:prstGeom>
-          <a:solidFill>
-            <a:srgbClr val="E5F5FB"/>
-          </a:solidFill>
-          <a:ln>
-            <a:noFill/>
-          </a:ln>
-          <a:effectLst/>
-        </p:spPr>
-        <p:style>
-          <a:lnRef idx="1">
-            <a:schemeClr val="accent1"/>
-          </a:lnRef>
-          <a:fillRef idx="3">
-            <a:schemeClr val="accent1"/>
-          </a:fillRef>
-          <a:effectRef idx="2">
-            <a:schemeClr val="accent1"/>
-          </a:effectRef>
-          <a:fontRef idx="minor">
-            <a:schemeClr val="lt1"/>
-          </a:fontRef>
-        </p:style>
-        <p:txBody>
-          <a:bodyPr rtlCol="0" anchor="ctr"/>
-          <a:lstStyle/>
-          <a:p>
-            <a:pPr algn="ctr"/>
-          </a:p>
-        </p:txBody>
-      </p:sp>
-      <p:sp>
-        <p:nvSpPr>
-          <p:cNvPr id="6" name="TextBox 5"/>
-          <p:cNvSpPr txBox="1"/>
-          <p:nvPr/>
-        </p:nvSpPr>
-        <p:spPr>
-          <a:xfrm>
-            <a:off x="859536" y="4626864"/>
-            <a:ext cx="10479024" cy="1051560"/>
-          </a:xfrm>
-          <a:prstGeom prst="rect">
-            <a:avLst/>
-          </a:prstGeom>
-          <a:noFill/>
-        </p:spPr>
-        <p:txBody>
-          <a:bodyPr wrap="square">
-            <a:spAutoFit/>
-          </a:bodyPr>
-          <a:lstStyle/>
+              <a:t>About three to four weeks on Progressa.</a:t>
+            </a:r>
+          </a:p>
           <a:p>
             <a:pPr>
               <a:spcAft>
-                <a:spcPts val="700"/>
+                <a:spcPts val="800"/>
               </a:spcAft>
             </a:pPr>
             <a:r>
-              <a:rPr sz="2300" b="1" i="0">
+              <a:rPr sz="1700" b="0" i="0">
                 <a:solidFill>
-                  <a:srgbClr val="006E96"/>
+                  <a:srgbClr val="595959"/>
                 </a:solidFill>
                 <a:latin typeface="Arial"/>
               </a:rPr>
-              <a:t>Discover first. Judge second.</a:t>
-            </a:r>
-          </a:p>
-        </p:txBody>
-      </p:sp>
-      <p:sp>
-        <p:nvSpPr>
-          <p:cNvPr id="7" name="TextBox 6"/>
+              <a:t>One deliverable: the Discovery brief.</a:t>
+            </a:r>
+          </a:p>
+        </p:txBody>
+      </p:sp>
+      <p:sp>
+        <p:nvSpPr>
+          <p:cNvPr id="5" name="TextBox 4"/>
           <p:cNvSpPr txBox="1"/>
           <p:nvPr/>
         </p:nvSpPr>
@@ -13628,6 +11957,41 @@
                 <a:latin typeface="Arial"/>
               </a:rPr>
               <a:t>4.2 · Phase 1, Discover — map what the sector has today</a:t>
+            </a:r>
+          </a:p>
+        </p:txBody>
+      </p:sp>
+      <p:sp>
+        <p:nvSpPr>
+          <p:cNvPr id="6" name="TextBox 5"/>
+          <p:cNvSpPr txBox="1"/>
+          <p:nvPr/>
+        </p:nvSpPr>
+        <p:spPr>
+          <a:xfrm>
+            <a:off x="10058400" y="6473952"/>
+            <a:ext cx="1673352" cy="292608"/>
+          </a:xfrm>
+          <a:prstGeom prst="rect">
+            <a:avLst/>
+          </a:prstGeom>
+          <a:noFill/>
+        </p:spPr>
+        <p:txBody>
+          <a:bodyPr wrap="square">
+            <a:spAutoFit/>
+          </a:bodyPr>
+          <a:lstStyle/>
+          <a:p>
+            <a:pPr algn="r"/>
+            <a:r>
+              <a:rPr sz="900" b="0" i="0">
+                <a:solidFill>
+                  <a:srgbClr val="595959"/>
+                </a:solidFill>
+                <a:latin typeface="Arial"/>
+              </a:rPr>
+              <a:t>www.itu.int</a:t>
             </a:r>
           </a:p>
         </p:txBody>
@@ -13723,84 +12087,27 @@
                 </a:solidFill>
                 <a:latin typeface="Arial"/>
               </a:rPr>
-              <a:t>The brief records three learner lists as a fact, not yet as a problem</a:t>
-            </a:r>
-          </a:p>
-        </p:txBody>
-      </p:sp>
-      <p:sp>
-        <p:nvSpPr>
-          <p:cNvPr id="4" name="TextBox 3"/>
-          <p:cNvSpPr txBox="1"/>
+              <a:t>Discovery collects five things — and judges none of them</a:t>
+            </a:r>
+          </a:p>
+        </p:txBody>
+      </p:sp>
+      <p:sp>
+        <p:nvSpPr>
+          <p:cNvPr id="4" name="Oval 3"/>
+          <p:cNvSpPr/>
           <p:nvPr/>
         </p:nvSpPr>
         <p:spPr>
           <a:xfrm>
-            <a:off x="658368" y="1600200"/>
-            <a:ext cx="10881360" cy="2651760"/>
-          </a:xfrm>
-          <a:prstGeom prst="rect">
+            <a:off x="621792" y="1508760"/>
+            <a:ext cx="310896" cy="310896"/>
+          </a:xfrm>
+          <a:prstGeom prst="ellipse">
             <a:avLst/>
           </a:prstGeom>
-          <a:noFill/>
-        </p:spPr>
-        <p:txBody>
-          <a:bodyPr wrap="square">
-            <a:spAutoFit/>
-          </a:bodyPr>
-          <a:lstStyle/>
-          <a:p>
-            <a:pPr>
-              <a:spcAft>
-                <a:spcPts val="1200"/>
-              </a:spcAft>
-            </a:pPr>
-            <a:r>
-              <a:rPr sz="2000" b="0" i="0">
-                <a:solidFill>
-                  <a:srgbClr val="1A1A1A"/>
-                </a:solidFill>
-                <a:latin typeface="Arial"/>
-              </a:rPr>
-              <a:t>Progressa's Discovery brief lays it out plainly. Five institutions, classified. The systems each runs. The registries — and here the brief simply records that three separate learner lists exist, in the census, the Examination Authority, and the grant programme.</a:t>
-            </a:r>
-          </a:p>
-          <a:p>
-            <a:pPr>
-              <a:spcAft>
-                <a:spcPts val="1200"/>
-              </a:spcAft>
-            </a:pPr>
-            <a:r>
-              <a:rPr sz="2000" b="0" i="0">
-                <a:solidFill>
-                  <a:srgbClr val="1A1A1A"/>
-                </a:solidFill>
-                <a:latin typeface="Arial"/>
-              </a:rPr>
-              <a:t>The data flows — mostly paper and manual re-entry between systems. The legal constraints — what each body is mandated to hold.</a:t>
-            </a:r>
-          </a:p>
-        </p:txBody>
-      </p:sp>
-      <p:sp>
-        <p:nvSpPr>
-          <p:cNvPr id="5" name="Rounded Rectangle 4"/>
-          <p:cNvSpPr/>
-          <p:nvPr/>
-        </p:nvSpPr>
-        <p:spPr>
-          <a:xfrm>
-            <a:off x="658368" y="4434840"/>
-            <a:ext cx="10881360" cy="1325880"/>
-          </a:xfrm>
-          <a:prstGeom prst="roundRect">
-            <a:avLst>
-              <a:gd name="adj" fmla="val 4500"/>
-            </a:avLst>
-          </a:prstGeom>
           <a:solidFill>
-            <a:srgbClr val="E5F5FB"/>
+            <a:srgbClr val="009CD6"/>
           </a:solidFill>
           <a:ln>
             <a:noFill/>
@@ -13822,23 +12129,32 @@
           </a:fontRef>
         </p:style>
         <p:txBody>
-          <a:bodyPr rtlCol="0" anchor="ctr"/>
+          <a:bodyPr rtlCol="0" anchor="ctr" lIns="0" rIns="0" tIns="0" bIns="0" wrap="square"/>
           <a:lstStyle/>
           <a:p>
             <a:pPr algn="ctr"/>
-          </a:p>
-        </p:txBody>
-      </p:sp>
-      <p:sp>
-        <p:nvSpPr>
-          <p:cNvPr id="6" name="TextBox 5"/>
+            <a:r>
+              <a:rPr sz="1300" b="1" i="0">
+                <a:solidFill>
+                  <a:srgbClr val="FFFFFF"/>
+                </a:solidFill>
+                <a:latin typeface="Arial"/>
+              </a:rPr>
+              <a:t>1</a:t>
+            </a:r>
+          </a:p>
+        </p:txBody>
+      </p:sp>
+      <p:sp>
+        <p:nvSpPr>
+          <p:cNvPr id="5" name="TextBox 4"/>
           <p:cNvSpPr txBox="1"/>
           <p:nvPr/>
         </p:nvSpPr>
         <p:spPr>
           <a:xfrm>
-            <a:off x="859536" y="4626864"/>
-            <a:ext cx="10479024" cy="1051560"/>
+            <a:off x="1115568" y="1463040"/>
+            <a:ext cx="10527487" cy="813815"/>
           </a:xfrm>
           <a:prstGeom prst="rect">
             <a:avLst/>
@@ -13853,24 +12169,682 @@
           <a:p>
             <a:pPr>
               <a:spcAft>
-                <a:spcPts val="700"/>
+                <a:spcPts val="300"/>
               </a:spcAft>
             </a:pPr>
             <a:r>
-              <a:rPr sz="2300" b="1" i="0">
+              <a:rPr sz="1900" b="1" i="0">
+                <a:solidFill>
+                  <a:srgbClr val="1A1A1A"/>
+                </a:solidFill>
+                <a:latin typeface="Arial"/>
+              </a:rPr>
+              <a:t>Strategies in force</a:t>
+            </a:r>
+          </a:p>
+          <a:p>
+            <a:pPr>
+              <a:spcAft>
+                <a:spcPts val="300"/>
+              </a:spcAft>
+            </a:pPr>
+            <a:r>
+              <a:rPr sz="1550" b="0" i="0">
+                <a:solidFill>
+                  <a:srgbClr val="595959"/>
+                </a:solidFill>
+                <a:latin typeface="Arial"/>
+              </a:rPr>
+              <a:t>The national digital strategy; the education sector plan.</a:t>
+            </a:r>
+          </a:p>
+        </p:txBody>
+      </p:sp>
+      <p:sp>
+        <p:nvSpPr>
+          <p:cNvPr id="6" name="Rectangle 5"/>
+          <p:cNvSpPr/>
+          <p:nvPr/>
+        </p:nvSpPr>
+        <p:spPr>
+          <a:xfrm>
+            <a:off x="621792" y="2281428"/>
+            <a:ext cx="10881360" cy="12700"/>
+          </a:xfrm>
+          <a:prstGeom prst="rect">
+            <a:avLst/>
+          </a:prstGeom>
+          <a:solidFill>
+            <a:srgbClr val="DDECF4"/>
+          </a:solidFill>
+          <a:ln>
+            <a:noFill/>
+          </a:ln>
+          <a:effectLst/>
+        </p:spPr>
+        <p:style>
+          <a:lnRef idx="1">
+            <a:schemeClr val="accent1"/>
+          </a:lnRef>
+          <a:fillRef idx="3">
+            <a:schemeClr val="accent1"/>
+          </a:fillRef>
+          <a:effectRef idx="2">
+            <a:schemeClr val="accent1"/>
+          </a:effectRef>
+          <a:fontRef idx="minor">
+            <a:schemeClr val="lt1"/>
+          </a:fontRef>
+        </p:style>
+        <p:txBody>
+          <a:bodyPr rtlCol="0" anchor="ctr"/>
+          <a:lstStyle/>
+          <a:p>
+            <a:pPr algn="ctr"/>
+          </a:p>
+        </p:txBody>
+      </p:sp>
+      <p:sp>
+        <p:nvSpPr>
+          <p:cNvPr id="7" name="Oval 6"/>
+          <p:cNvSpPr/>
+          <p:nvPr/>
+        </p:nvSpPr>
+        <p:spPr>
+          <a:xfrm>
+            <a:off x="621792" y="2368296"/>
+            <a:ext cx="310896" cy="310896"/>
+          </a:xfrm>
+          <a:prstGeom prst="ellipse">
+            <a:avLst/>
+          </a:prstGeom>
+          <a:solidFill>
+            <a:srgbClr val="009CD6"/>
+          </a:solidFill>
+          <a:ln>
+            <a:noFill/>
+          </a:ln>
+          <a:effectLst/>
+        </p:spPr>
+        <p:style>
+          <a:lnRef idx="1">
+            <a:schemeClr val="accent1"/>
+          </a:lnRef>
+          <a:fillRef idx="3">
+            <a:schemeClr val="accent1"/>
+          </a:fillRef>
+          <a:effectRef idx="2">
+            <a:schemeClr val="accent1"/>
+          </a:effectRef>
+          <a:fontRef idx="minor">
+            <a:schemeClr val="lt1"/>
+          </a:fontRef>
+        </p:style>
+        <p:txBody>
+          <a:bodyPr rtlCol="0" anchor="ctr" lIns="0" rIns="0" tIns="0" bIns="0" wrap="square"/>
+          <a:lstStyle/>
+          <a:p>
+            <a:pPr algn="ctr"/>
+            <a:r>
+              <a:rPr sz="1300" b="1" i="0">
+                <a:solidFill>
+                  <a:srgbClr val="FFFFFF"/>
+                </a:solidFill>
+                <a:latin typeface="Arial"/>
+              </a:rPr>
+              <a:t>2</a:t>
+            </a:r>
+          </a:p>
+        </p:txBody>
+      </p:sp>
+      <p:sp>
+        <p:nvSpPr>
+          <p:cNvPr id="8" name="TextBox 7"/>
+          <p:cNvSpPr txBox="1"/>
+          <p:nvPr/>
+        </p:nvSpPr>
+        <p:spPr>
+          <a:xfrm>
+            <a:off x="1115568" y="2322576"/>
+            <a:ext cx="10527487" cy="813815"/>
+          </a:xfrm>
+          <a:prstGeom prst="rect">
+            <a:avLst/>
+          </a:prstGeom>
+          <a:noFill/>
+        </p:spPr>
+        <p:txBody>
+          <a:bodyPr wrap="square">
+            <a:spAutoFit/>
+          </a:bodyPr>
+          <a:lstStyle/>
+          <a:p>
+            <a:pPr>
+              <a:spcAft>
+                <a:spcPts val="300"/>
+              </a:spcAft>
+            </a:pPr>
+            <a:r>
+              <a:rPr sz="1900" b="1" i="0">
+                <a:solidFill>
+                  <a:srgbClr val="1A1A1A"/>
+                </a:solidFill>
+                <a:latin typeface="Arial"/>
+              </a:rPr>
+              <a:t>Systems that exist</a:t>
+            </a:r>
+          </a:p>
+          <a:p>
+            <a:pPr>
+              <a:spcAft>
+                <a:spcPts val="300"/>
+              </a:spcAft>
+            </a:pPr>
+            <a:r>
+              <a:rPr sz="1550" b="0" i="0">
+                <a:solidFill>
+                  <a:srgbClr val="595959"/>
+                </a:solidFill>
+                <a:latin typeface="Arial"/>
+              </a:rPr>
+              <a:t>School census, exam management, the social grant system.</a:t>
+            </a:r>
+          </a:p>
+        </p:txBody>
+      </p:sp>
+      <p:sp>
+        <p:nvSpPr>
+          <p:cNvPr id="9" name="Rectangle 8"/>
+          <p:cNvSpPr/>
+          <p:nvPr/>
+        </p:nvSpPr>
+        <p:spPr>
+          <a:xfrm>
+            <a:off x="621792" y="3140963"/>
+            <a:ext cx="10881360" cy="12700"/>
+          </a:xfrm>
+          <a:prstGeom prst="rect">
+            <a:avLst/>
+          </a:prstGeom>
+          <a:solidFill>
+            <a:srgbClr val="DDECF4"/>
+          </a:solidFill>
+          <a:ln>
+            <a:noFill/>
+          </a:ln>
+          <a:effectLst/>
+        </p:spPr>
+        <p:style>
+          <a:lnRef idx="1">
+            <a:schemeClr val="accent1"/>
+          </a:lnRef>
+          <a:fillRef idx="3">
+            <a:schemeClr val="accent1"/>
+          </a:fillRef>
+          <a:effectRef idx="2">
+            <a:schemeClr val="accent1"/>
+          </a:effectRef>
+          <a:fontRef idx="minor">
+            <a:schemeClr val="lt1"/>
+          </a:fontRef>
+        </p:style>
+        <p:txBody>
+          <a:bodyPr rtlCol="0" anchor="ctr"/>
+          <a:lstStyle/>
+          <a:p>
+            <a:pPr algn="ctr"/>
+          </a:p>
+        </p:txBody>
+      </p:sp>
+      <p:sp>
+        <p:nvSpPr>
+          <p:cNvPr id="10" name="Oval 9"/>
+          <p:cNvSpPr/>
+          <p:nvPr/>
+        </p:nvSpPr>
+        <p:spPr>
+          <a:xfrm>
+            <a:off x="621792" y="3227831"/>
+            <a:ext cx="310896" cy="310896"/>
+          </a:xfrm>
+          <a:prstGeom prst="ellipse">
+            <a:avLst/>
+          </a:prstGeom>
+          <a:solidFill>
+            <a:srgbClr val="009CD6"/>
+          </a:solidFill>
+          <a:ln>
+            <a:noFill/>
+          </a:ln>
+          <a:effectLst/>
+        </p:spPr>
+        <p:style>
+          <a:lnRef idx="1">
+            <a:schemeClr val="accent1"/>
+          </a:lnRef>
+          <a:fillRef idx="3">
+            <a:schemeClr val="accent1"/>
+          </a:fillRef>
+          <a:effectRef idx="2">
+            <a:schemeClr val="accent1"/>
+          </a:effectRef>
+          <a:fontRef idx="minor">
+            <a:schemeClr val="lt1"/>
+          </a:fontRef>
+        </p:style>
+        <p:txBody>
+          <a:bodyPr rtlCol="0" anchor="ctr" lIns="0" rIns="0" tIns="0" bIns="0" wrap="square"/>
+          <a:lstStyle/>
+          <a:p>
+            <a:pPr algn="ctr"/>
+            <a:r>
+              <a:rPr sz="1300" b="1" i="0">
+                <a:solidFill>
+                  <a:srgbClr val="FFFFFF"/>
+                </a:solidFill>
+                <a:latin typeface="Arial"/>
+              </a:rPr>
+              <a:t>3</a:t>
+            </a:r>
+          </a:p>
+        </p:txBody>
+      </p:sp>
+      <p:sp>
+        <p:nvSpPr>
+          <p:cNvPr id="11" name="TextBox 10"/>
+          <p:cNvSpPr txBox="1"/>
+          <p:nvPr/>
+        </p:nvSpPr>
+        <p:spPr>
+          <a:xfrm>
+            <a:off x="1115568" y="3182111"/>
+            <a:ext cx="10527487" cy="813815"/>
+          </a:xfrm>
+          <a:prstGeom prst="rect">
+            <a:avLst/>
+          </a:prstGeom>
+          <a:noFill/>
+        </p:spPr>
+        <p:txBody>
+          <a:bodyPr wrap="square">
+            <a:spAutoFit/>
+          </a:bodyPr>
+          <a:lstStyle/>
+          <a:p>
+            <a:pPr>
+              <a:spcAft>
+                <a:spcPts val="300"/>
+              </a:spcAft>
+            </a:pPr>
+            <a:r>
+              <a:rPr sz="1900" b="1" i="0">
+                <a:solidFill>
+                  <a:srgbClr val="1A1A1A"/>
+                </a:solidFill>
+                <a:latin typeface="Arial"/>
+              </a:rPr>
+              <a:t>Registries and who owns them</a:t>
+            </a:r>
+          </a:p>
+          <a:p>
+            <a:pPr>
+              <a:spcAft>
+                <a:spcPts val="300"/>
+              </a:spcAft>
+            </a:pPr>
+            <a:r>
+              <a:rPr sz="1550" b="0" i="0">
+                <a:solidFill>
+                  <a:srgbClr val="595959"/>
+                </a:solidFill>
+                <a:latin typeface="Arial"/>
+              </a:rPr>
+              <a:t>The learner lists; the identity register.</a:t>
+            </a:r>
+          </a:p>
+        </p:txBody>
+      </p:sp>
+      <p:sp>
+        <p:nvSpPr>
+          <p:cNvPr id="12" name="Rectangle 11"/>
+          <p:cNvSpPr/>
+          <p:nvPr/>
+        </p:nvSpPr>
+        <p:spPr>
+          <a:xfrm>
+            <a:off x="621792" y="4000500"/>
+            <a:ext cx="10881360" cy="12700"/>
+          </a:xfrm>
+          <a:prstGeom prst="rect">
+            <a:avLst/>
+          </a:prstGeom>
+          <a:solidFill>
+            <a:srgbClr val="DDECF4"/>
+          </a:solidFill>
+          <a:ln>
+            <a:noFill/>
+          </a:ln>
+          <a:effectLst/>
+        </p:spPr>
+        <p:style>
+          <a:lnRef idx="1">
+            <a:schemeClr val="accent1"/>
+          </a:lnRef>
+          <a:fillRef idx="3">
+            <a:schemeClr val="accent1"/>
+          </a:fillRef>
+          <a:effectRef idx="2">
+            <a:schemeClr val="accent1"/>
+          </a:effectRef>
+          <a:fontRef idx="minor">
+            <a:schemeClr val="lt1"/>
+          </a:fontRef>
+        </p:style>
+        <p:txBody>
+          <a:bodyPr rtlCol="0" anchor="ctr"/>
+          <a:lstStyle/>
+          <a:p>
+            <a:pPr algn="ctr"/>
+          </a:p>
+        </p:txBody>
+      </p:sp>
+      <p:sp>
+        <p:nvSpPr>
+          <p:cNvPr id="13" name="Oval 12"/>
+          <p:cNvSpPr/>
+          <p:nvPr/>
+        </p:nvSpPr>
+        <p:spPr>
+          <a:xfrm>
+            <a:off x="621792" y="4087368"/>
+            <a:ext cx="310896" cy="310896"/>
+          </a:xfrm>
+          <a:prstGeom prst="ellipse">
+            <a:avLst/>
+          </a:prstGeom>
+          <a:solidFill>
+            <a:srgbClr val="009CD6"/>
+          </a:solidFill>
+          <a:ln>
+            <a:noFill/>
+          </a:ln>
+          <a:effectLst/>
+        </p:spPr>
+        <p:style>
+          <a:lnRef idx="1">
+            <a:schemeClr val="accent1"/>
+          </a:lnRef>
+          <a:fillRef idx="3">
+            <a:schemeClr val="accent1"/>
+          </a:fillRef>
+          <a:effectRef idx="2">
+            <a:schemeClr val="accent1"/>
+          </a:effectRef>
+          <a:fontRef idx="minor">
+            <a:schemeClr val="lt1"/>
+          </a:fontRef>
+        </p:style>
+        <p:txBody>
+          <a:bodyPr rtlCol="0" anchor="ctr" lIns="0" rIns="0" tIns="0" bIns="0" wrap="square"/>
+          <a:lstStyle/>
+          <a:p>
+            <a:pPr algn="ctr"/>
+            <a:r>
+              <a:rPr sz="1300" b="1" i="0">
+                <a:solidFill>
+                  <a:srgbClr val="FFFFFF"/>
+                </a:solidFill>
+                <a:latin typeface="Arial"/>
+              </a:rPr>
+              <a:t>4</a:t>
+            </a:r>
+          </a:p>
+        </p:txBody>
+      </p:sp>
+      <p:sp>
+        <p:nvSpPr>
+          <p:cNvPr id="14" name="TextBox 13"/>
+          <p:cNvSpPr txBox="1"/>
+          <p:nvPr/>
+        </p:nvSpPr>
+        <p:spPr>
+          <a:xfrm>
+            <a:off x="1115568" y="4041648"/>
+            <a:ext cx="10527487" cy="813815"/>
+          </a:xfrm>
+          <a:prstGeom prst="rect">
+            <a:avLst/>
+          </a:prstGeom>
+          <a:noFill/>
+        </p:spPr>
+        <p:txBody>
+          <a:bodyPr wrap="square">
+            <a:spAutoFit/>
+          </a:bodyPr>
+          <a:lstStyle/>
+          <a:p>
+            <a:pPr>
+              <a:spcAft>
+                <a:spcPts val="300"/>
+              </a:spcAft>
+            </a:pPr>
+            <a:r>
+              <a:rPr sz="1900" b="1" i="0">
+                <a:solidFill>
+                  <a:srgbClr val="1A1A1A"/>
+                </a:solidFill>
+                <a:latin typeface="Arial"/>
+              </a:rPr>
+              <a:t>Stakeholders</a:t>
+            </a:r>
+          </a:p>
+          <a:p>
+            <a:pPr>
+              <a:spcAft>
+                <a:spcPts val="300"/>
+              </a:spcAft>
+            </a:pPr>
+            <a:r>
+              <a:rPr sz="1550" b="0" i="0">
+                <a:solidFill>
+                  <a:srgbClr val="595959"/>
+                </a:solidFill>
+                <a:latin typeface="Arial"/>
+              </a:rPr>
+              <a:t>The ministry, the authorities, the donors funding each piece.</a:t>
+            </a:r>
+          </a:p>
+        </p:txBody>
+      </p:sp>
+      <p:sp>
+        <p:nvSpPr>
+          <p:cNvPr id="15" name="Rectangle 14"/>
+          <p:cNvSpPr/>
+          <p:nvPr/>
+        </p:nvSpPr>
+        <p:spPr>
+          <a:xfrm>
+            <a:off x="621792" y="4860036"/>
+            <a:ext cx="10881360" cy="12700"/>
+          </a:xfrm>
+          <a:prstGeom prst="rect">
+            <a:avLst/>
+          </a:prstGeom>
+          <a:solidFill>
+            <a:srgbClr val="DDECF4"/>
+          </a:solidFill>
+          <a:ln>
+            <a:noFill/>
+          </a:ln>
+          <a:effectLst/>
+        </p:spPr>
+        <p:style>
+          <a:lnRef idx="1">
+            <a:schemeClr val="accent1"/>
+          </a:lnRef>
+          <a:fillRef idx="3">
+            <a:schemeClr val="accent1"/>
+          </a:fillRef>
+          <a:effectRef idx="2">
+            <a:schemeClr val="accent1"/>
+          </a:effectRef>
+          <a:fontRef idx="minor">
+            <a:schemeClr val="lt1"/>
+          </a:fontRef>
+        </p:style>
+        <p:txBody>
+          <a:bodyPr rtlCol="0" anchor="ctr"/>
+          <a:lstStyle/>
+          <a:p>
+            <a:pPr algn="ctr"/>
+          </a:p>
+        </p:txBody>
+      </p:sp>
+      <p:sp>
+        <p:nvSpPr>
+          <p:cNvPr id="16" name="Oval 15"/>
+          <p:cNvSpPr/>
+          <p:nvPr/>
+        </p:nvSpPr>
+        <p:spPr>
+          <a:xfrm>
+            <a:off x="621792" y="4946903"/>
+            <a:ext cx="310896" cy="310896"/>
+          </a:xfrm>
+          <a:prstGeom prst="ellipse">
+            <a:avLst/>
+          </a:prstGeom>
+          <a:solidFill>
+            <a:srgbClr val="009CD6"/>
+          </a:solidFill>
+          <a:ln>
+            <a:noFill/>
+          </a:ln>
+          <a:effectLst/>
+        </p:spPr>
+        <p:style>
+          <a:lnRef idx="1">
+            <a:schemeClr val="accent1"/>
+          </a:lnRef>
+          <a:fillRef idx="3">
+            <a:schemeClr val="accent1"/>
+          </a:fillRef>
+          <a:effectRef idx="2">
+            <a:schemeClr val="accent1"/>
+          </a:effectRef>
+          <a:fontRef idx="minor">
+            <a:schemeClr val="lt1"/>
+          </a:fontRef>
+        </p:style>
+        <p:txBody>
+          <a:bodyPr rtlCol="0" anchor="ctr" lIns="0" rIns="0" tIns="0" bIns="0" wrap="square"/>
+          <a:lstStyle/>
+          <a:p>
+            <a:pPr algn="ctr"/>
+            <a:r>
+              <a:rPr sz="1300" b="1" i="0">
+                <a:solidFill>
+                  <a:srgbClr val="FFFFFF"/>
+                </a:solidFill>
+                <a:latin typeface="Arial"/>
+              </a:rPr>
+              <a:t>5</a:t>
+            </a:r>
+          </a:p>
+        </p:txBody>
+      </p:sp>
+      <p:sp>
+        <p:nvSpPr>
+          <p:cNvPr id="17" name="TextBox 16"/>
+          <p:cNvSpPr txBox="1"/>
+          <p:nvPr/>
+        </p:nvSpPr>
+        <p:spPr>
+          <a:xfrm>
+            <a:off x="1115568" y="4901183"/>
+            <a:ext cx="10527487" cy="813815"/>
+          </a:xfrm>
+          <a:prstGeom prst="rect">
+            <a:avLst/>
+          </a:prstGeom>
+          <a:noFill/>
+        </p:spPr>
+        <p:txBody>
+          <a:bodyPr wrap="square">
+            <a:spAutoFit/>
+          </a:bodyPr>
+          <a:lstStyle/>
+          <a:p>
+            <a:pPr>
+              <a:spcAft>
+                <a:spcPts val="300"/>
+              </a:spcAft>
+            </a:pPr>
+            <a:r>
+              <a:rPr sz="1900" b="1" i="0">
+                <a:solidFill>
+                  <a:srgbClr val="1A1A1A"/>
+                </a:solidFill>
+                <a:latin typeface="Arial"/>
+              </a:rPr>
+              <a:t>The legal framework</a:t>
+            </a:r>
+          </a:p>
+          <a:p>
+            <a:pPr>
+              <a:spcAft>
+                <a:spcPts val="300"/>
+              </a:spcAft>
+            </a:pPr>
+            <a:r>
+              <a:rPr sz="1550" b="0" i="0">
+                <a:solidFill>
+                  <a:srgbClr val="595959"/>
+                </a:solidFill>
+                <a:latin typeface="Arial"/>
+              </a:rPr>
+              <a:t>The data-protection act; the mandate of each body.</a:t>
+            </a:r>
+          </a:p>
+        </p:txBody>
+      </p:sp>
+      <p:sp>
+        <p:nvSpPr>
+          <p:cNvPr id="18" name="TextBox 17"/>
+          <p:cNvSpPr txBox="1"/>
+          <p:nvPr/>
+        </p:nvSpPr>
+        <p:spPr>
+          <a:xfrm>
+            <a:off x="658368" y="5870448"/>
+            <a:ext cx="10881360" cy="548640"/>
+          </a:xfrm>
+          <a:prstGeom prst="rect">
+            <a:avLst/>
+          </a:prstGeom>
+          <a:noFill/>
+        </p:spPr>
+        <p:txBody>
+          <a:bodyPr wrap="square">
+            <a:spAutoFit/>
+          </a:bodyPr>
+          <a:lstStyle/>
+          <a:p>
+            <a:r>
+              <a:rPr sz="1550" b="1" i="0">
                 <a:solidFill>
                   <a:srgbClr val="006E96"/>
                 </a:solidFill>
                 <a:latin typeface="Arial"/>
               </a:rPr>
-              <a:t>No recommendations. Just the picture, accurate enough to build on.</a:t>
-            </a:r>
-          </a:p>
-        </p:txBody>
-      </p:sp>
-      <p:sp>
-        <p:nvSpPr>
-          <p:cNvPr id="7" name="TextBox 6"/>
+              <a:t>You gather. You do not judge.</a:t>
+            </a:r>
+          </a:p>
+        </p:txBody>
+      </p:sp>
+      <p:sp>
+        <p:nvSpPr>
+          <p:cNvPr id="19" name="TextBox 18"/>
           <p:cNvSpPr txBox="1"/>
           <p:nvPr/>
         </p:nvSpPr>
@@ -13993,7 +12967,7 @@
                 </a:solidFill>
                 <a:latin typeface="Arial"/>
               </a:rPr>
-              <a:t>Sign-off one: accurate. Not complete, not perfect — accurate</a:t>
+              <a:t>Describe without recommending — the judgement belongs to the next phase</a:t>
             </a:r>
           </a:p>
         </p:txBody>
@@ -14032,7 +13006,7 @@
                 </a:solidFill>
                 <a:latin typeface="Arial"/>
               </a:rPr>
-              <a:t>Discovery ends with the first of the lifecycle's four sign-offs. On Progressa, the digitalisation officer chairing the EA Board confirms one thing: the picture is accurate enough to build on.</a:t>
+              <a:t>When your architects find that the Examination Authority keeps its own learner list, the urge is to write "this should be fixed". Resist it.</a:t>
             </a:r>
           </a:p>
           <a:p>
@@ -14048,7 +13022,7 @@
                 </a:solidFill>
                 <a:latin typeface="Arial"/>
               </a:rPr>
-              <a:t>This gate is cheap and fast, and skipping it is expensive.</a:t>
+              <a:t>Discovery records that the list exists, who owns it, how many learners it holds. Whether it is a problem, how severe, what priority — that belongs to Assess. Mixing them biases the assessment before you have the full picture.</a:t>
             </a:r>
           </a:p>
         </p:txBody>
@@ -14133,7 +13107,7 @@
                 </a:solidFill>
                 <a:latin typeface="Arial"/>
               </a:rPr>
-              <a:t>An assessment built on a wrong picture produces wrong priorities.</a:t>
+              <a:t>Discover first. Judge second.</a:t>
             </a:r>
           </a:p>
         </p:txBody>
@@ -14192,6 +13166,546 @@
       <p:grpSpPr/>
       <p:sp>
         <p:nvSpPr>
+          <p:cNvPr id="2" name="Rectangle 1"/>
+          <p:cNvSpPr/>
+          <p:nvPr/>
+        </p:nvSpPr>
+        <p:spPr>
+          <a:xfrm>
+            <a:off x="457200" y="384048"/>
+            <a:ext cx="45720" cy="256032"/>
+          </a:xfrm>
+          <a:prstGeom prst="rect">
+            <a:avLst/>
+          </a:prstGeom>
+          <a:solidFill>
+            <a:srgbClr val="009CD6"/>
+          </a:solidFill>
+          <a:ln>
+            <a:noFill/>
+          </a:ln>
+          <a:effectLst/>
+        </p:spPr>
+        <p:style>
+          <a:lnRef idx="1">
+            <a:schemeClr val="accent1"/>
+          </a:lnRef>
+          <a:fillRef idx="3">
+            <a:schemeClr val="accent1"/>
+          </a:fillRef>
+          <a:effectRef idx="2">
+            <a:schemeClr val="accent1"/>
+          </a:effectRef>
+          <a:fontRef idx="minor">
+            <a:schemeClr val="lt1"/>
+          </a:fontRef>
+        </p:style>
+        <p:txBody>
+          <a:bodyPr rtlCol="0" anchor="ctr"/>
+          <a:lstStyle/>
+          <a:p>
+            <a:pPr algn="ctr"/>
+          </a:p>
+        </p:txBody>
+      </p:sp>
+      <p:sp>
+        <p:nvSpPr>
+          <p:cNvPr id="3" name="TextBox 2"/>
+          <p:cNvSpPr txBox="1"/>
+          <p:nvPr/>
+        </p:nvSpPr>
+        <p:spPr>
+          <a:xfrm>
+            <a:off x="621792" y="274320"/>
+            <a:ext cx="11247120" cy="914400"/>
+          </a:xfrm>
+          <a:prstGeom prst="rect">
+            <a:avLst/>
+          </a:prstGeom>
+          <a:noFill/>
+        </p:spPr>
+        <p:txBody>
+          <a:bodyPr wrap="square">
+            <a:spAutoFit/>
+          </a:bodyPr>
+          <a:lstStyle/>
+          <a:p>
+            <a:r>
+              <a:rPr sz="2800" b="1" i="0">
+                <a:solidFill>
+                  <a:srgbClr val="1A1A1A"/>
+                </a:solidFill>
+                <a:latin typeface="Arial"/>
+              </a:rPr>
+              <a:t>The brief records three learner lists as a fact, not yet as a problem</a:t>
+            </a:r>
+          </a:p>
+        </p:txBody>
+      </p:sp>
+      <p:sp>
+        <p:nvSpPr>
+          <p:cNvPr id="4" name="TextBox 3"/>
+          <p:cNvSpPr txBox="1"/>
+          <p:nvPr/>
+        </p:nvSpPr>
+        <p:spPr>
+          <a:xfrm>
+            <a:off x="658368" y="1600200"/>
+            <a:ext cx="10881360" cy="2651760"/>
+          </a:xfrm>
+          <a:prstGeom prst="rect">
+            <a:avLst/>
+          </a:prstGeom>
+          <a:noFill/>
+        </p:spPr>
+        <p:txBody>
+          <a:bodyPr wrap="square">
+            <a:spAutoFit/>
+          </a:bodyPr>
+          <a:lstStyle/>
+          <a:p>
+            <a:pPr>
+              <a:spcAft>
+                <a:spcPts val="1200"/>
+              </a:spcAft>
+            </a:pPr>
+            <a:r>
+              <a:rPr sz="2000" b="0" i="0">
+                <a:solidFill>
+                  <a:srgbClr val="1A1A1A"/>
+                </a:solidFill>
+                <a:latin typeface="Arial"/>
+              </a:rPr>
+              <a:t>Progressa's Discovery brief lays it out plainly. Five institutions, classified. The systems each runs. The registries — and here the brief simply records that three separate learner lists exist, in the census, the Examination Authority, and the grant programme.</a:t>
+            </a:r>
+          </a:p>
+          <a:p>
+            <a:pPr>
+              <a:spcAft>
+                <a:spcPts val="1200"/>
+              </a:spcAft>
+            </a:pPr>
+            <a:r>
+              <a:rPr sz="2000" b="0" i="0">
+                <a:solidFill>
+                  <a:srgbClr val="1A1A1A"/>
+                </a:solidFill>
+                <a:latin typeface="Arial"/>
+              </a:rPr>
+              <a:t>The data flows — mostly paper and manual re-entry between systems. The legal constraints — what each body is mandated to hold.</a:t>
+            </a:r>
+          </a:p>
+        </p:txBody>
+      </p:sp>
+      <p:sp>
+        <p:nvSpPr>
+          <p:cNvPr id="5" name="Rounded Rectangle 4"/>
+          <p:cNvSpPr/>
+          <p:nvPr/>
+        </p:nvSpPr>
+        <p:spPr>
+          <a:xfrm>
+            <a:off x="658368" y="4434840"/>
+            <a:ext cx="10881360" cy="1325880"/>
+          </a:xfrm>
+          <a:prstGeom prst="roundRect">
+            <a:avLst>
+              <a:gd name="adj" fmla="val 4500"/>
+            </a:avLst>
+          </a:prstGeom>
+          <a:solidFill>
+            <a:srgbClr val="E5F5FB"/>
+          </a:solidFill>
+          <a:ln>
+            <a:noFill/>
+          </a:ln>
+          <a:effectLst/>
+        </p:spPr>
+        <p:style>
+          <a:lnRef idx="1">
+            <a:schemeClr val="accent1"/>
+          </a:lnRef>
+          <a:fillRef idx="3">
+            <a:schemeClr val="accent1"/>
+          </a:fillRef>
+          <a:effectRef idx="2">
+            <a:schemeClr val="accent1"/>
+          </a:effectRef>
+          <a:fontRef idx="minor">
+            <a:schemeClr val="lt1"/>
+          </a:fontRef>
+        </p:style>
+        <p:txBody>
+          <a:bodyPr rtlCol="0" anchor="ctr"/>
+          <a:lstStyle/>
+          <a:p>
+            <a:pPr algn="ctr"/>
+          </a:p>
+        </p:txBody>
+      </p:sp>
+      <p:sp>
+        <p:nvSpPr>
+          <p:cNvPr id="6" name="TextBox 5"/>
+          <p:cNvSpPr txBox="1"/>
+          <p:nvPr/>
+        </p:nvSpPr>
+        <p:spPr>
+          <a:xfrm>
+            <a:off x="859536" y="4626864"/>
+            <a:ext cx="10479024" cy="1051560"/>
+          </a:xfrm>
+          <a:prstGeom prst="rect">
+            <a:avLst/>
+          </a:prstGeom>
+          <a:noFill/>
+        </p:spPr>
+        <p:txBody>
+          <a:bodyPr wrap="square">
+            <a:spAutoFit/>
+          </a:bodyPr>
+          <a:lstStyle/>
+          <a:p>
+            <a:pPr>
+              <a:spcAft>
+                <a:spcPts val="700"/>
+              </a:spcAft>
+            </a:pPr>
+            <a:r>
+              <a:rPr sz="2300" b="1" i="0">
+                <a:solidFill>
+                  <a:srgbClr val="006E96"/>
+                </a:solidFill>
+                <a:latin typeface="Arial"/>
+              </a:rPr>
+              <a:t>No recommendations. Just the picture, accurate enough to build on.</a:t>
+            </a:r>
+          </a:p>
+        </p:txBody>
+      </p:sp>
+      <p:sp>
+        <p:nvSpPr>
+          <p:cNvPr id="7" name="TextBox 6"/>
+          <p:cNvSpPr txBox="1"/>
+          <p:nvPr/>
+        </p:nvSpPr>
+        <p:spPr>
+          <a:xfrm>
+            <a:off x="457200" y="6473952"/>
+            <a:ext cx="7772400" cy="292608"/>
+          </a:xfrm>
+          <a:prstGeom prst="rect">
+            <a:avLst/>
+          </a:prstGeom>
+          <a:noFill/>
+        </p:spPr>
+        <p:txBody>
+          <a:bodyPr wrap="square">
+            <a:spAutoFit/>
+          </a:bodyPr>
+          <a:lstStyle/>
+          <a:p>
+            <a:r>
+              <a:rPr sz="900" b="0" i="0">
+                <a:solidFill>
+                  <a:srgbClr val="595959"/>
+                </a:solidFill>
+                <a:latin typeface="Arial"/>
+              </a:rPr>
+              <a:t>4.2 · Phase 1, Discover — map what the sector has today</a:t>
+            </a:r>
+          </a:p>
+        </p:txBody>
+      </p:sp>
+    </p:spTree>
+  </p:cSld>
+  <p:clrMapOvr>
+    <a:masterClrMapping/>
+  </p:clrMapOvr>
+</p:sld>
+</file>
+
+<file path=ppt/slides/slide16.xml><?xml version="1.0" encoding="utf-8"?>
+<p:sld xmlns:a="http://schemas.openxmlformats.org/drawingml/2006/main" xmlns:p="http://schemas.openxmlformats.org/presentationml/2006/main" xmlns:r="http://schemas.openxmlformats.org/officeDocument/2006/relationships">
+  <p:cSld>
+    <p:spTree>
+      <p:nvGrpSpPr>
+        <p:cNvPr id="1" name=""/>
+        <p:cNvGrpSpPr/>
+        <p:nvPr/>
+      </p:nvGrpSpPr>
+      <p:grpSpPr/>
+      <p:sp>
+        <p:nvSpPr>
+          <p:cNvPr id="2" name="Rectangle 1"/>
+          <p:cNvSpPr/>
+          <p:nvPr/>
+        </p:nvSpPr>
+        <p:spPr>
+          <a:xfrm>
+            <a:off x="457200" y="384048"/>
+            <a:ext cx="45720" cy="256032"/>
+          </a:xfrm>
+          <a:prstGeom prst="rect">
+            <a:avLst/>
+          </a:prstGeom>
+          <a:solidFill>
+            <a:srgbClr val="009CD6"/>
+          </a:solidFill>
+          <a:ln>
+            <a:noFill/>
+          </a:ln>
+          <a:effectLst/>
+        </p:spPr>
+        <p:style>
+          <a:lnRef idx="1">
+            <a:schemeClr val="accent1"/>
+          </a:lnRef>
+          <a:fillRef idx="3">
+            <a:schemeClr val="accent1"/>
+          </a:fillRef>
+          <a:effectRef idx="2">
+            <a:schemeClr val="accent1"/>
+          </a:effectRef>
+          <a:fontRef idx="minor">
+            <a:schemeClr val="lt1"/>
+          </a:fontRef>
+        </p:style>
+        <p:txBody>
+          <a:bodyPr rtlCol="0" anchor="ctr"/>
+          <a:lstStyle/>
+          <a:p>
+            <a:pPr algn="ctr"/>
+          </a:p>
+        </p:txBody>
+      </p:sp>
+      <p:sp>
+        <p:nvSpPr>
+          <p:cNvPr id="3" name="TextBox 2"/>
+          <p:cNvSpPr txBox="1"/>
+          <p:nvPr/>
+        </p:nvSpPr>
+        <p:spPr>
+          <a:xfrm>
+            <a:off x="621792" y="274320"/>
+            <a:ext cx="11247120" cy="914400"/>
+          </a:xfrm>
+          <a:prstGeom prst="rect">
+            <a:avLst/>
+          </a:prstGeom>
+          <a:noFill/>
+        </p:spPr>
+        <p:txBody>
+          <a:bodyPr wrap="square">
+            <a:spAutoFit/>
+          </a:bodyPr>
+          <a:lstStyle/>
+          <a:p>
+            <a:r>
+              <a:rPr sz="2800" b="1" i="0">
+                <a:solidFill>
+                  <a:srgbClr val="1A1A1A"/>
+                </a:solidFill>
+                <a:latin typeface="Arial"/>
+              </a:rPr>
+              <a:t>Sign-off one: accurate. Not complete, not perfect — accurate</a:t>
+            </a:r>
+          </a:p>
+        </p:txBody>
+      </p:sp>
+      <p:sp>
+        <p:nvSpPr>
+          <p:cNvPr id="4" name="TextBox 3"/>
+          <p:cNvSpPr txBox="1"/>
+          <p:nvPr/>
+        </p:nvSpPr>
+        <p:spPr>
+          <a:xfrm>
+            <a:off x="658368" y="1600200"/>
+            <a:ext cx="10881360" cy="2651760"/>
+          </a:xfrm>
+          <a:prstGeom prst="rect">
+            <a:avLst/>
+          </a:prstGeom>
+          <a:noFill/>
+        </p:spPr>
+        <p:txBody>
+          <a:bodyPr wrap="square">
+            <a:spAutoFit/>
+          </a:bodyPr>
+          <a:lstStyle/>
+          <a:p>
+            <a:pPr>
+              <a:spcAft>
+                <a:spcPts val="1200"/>
+              </a:spcAft>
+            </a:pPr>
+            <a:r>
+              <a:rPr sz="2000" b="0" i="0">
+                <a:solidFill>
+                  <a:srgbClr val="1A1A1A"/>
+                </a:solidFill>
+                <a:latin typeface="Arial"/>
+              </a:rPr>
+              <a:t>Discovery ends with the first of the lifecycle's four sign-offs. On Progressa, the digitalisation officer chairing the EA Board confirms one thing: the picture is accurate enough to build on.</a:t>
+            </a:r>
+          </a:p>
+          <a:p>
+            <a:pPr>
+              <a:spcAft>
+                <a:spcPts val="1200"/>
+              </a:spcAft>
+            </a:pPr>
+            <a:r>
+              <a:rPr sz="2000" b="0" i="0">
+                <a:solidFill>
+                  <a:srgbClr val="1A1A1A"/>
+                </a:solidFill>
+                <a:latin typeface="Arial"/>
+              </a:rPr>
+              <a:t>This gate is cheap and fast, and skipping it is expensive.</a:t>
+            </a:r>
+          </a:p>
+        </p:txBody>
+      </p:sp>
+      <p:sp>
+        <p:nvSpPr>
+          <p:cNvPr id="5" name="Rounded Rectangle 4"/>
+          <p:cNvSpPr/>
+          <p:nvPr/>
+        </p:nvSpPr>
+        <p:spPr>
+          <a:xfrm>
+            <a:off x="658368" y="4434840"/>
+            <a:ext cx="10881360" cy="1325880"/>
+          </a:xfrm>
+          <a:prstGeom prst="roundRect">
+            <a:avLst>
+              <a:gd name="adj" fmla="val 4500"/>
+            </a:avLst>
+          </a:prstGeom>
+          <a:solidFill>
+            <a:srgbClr val="E5F5FB"/>
+          </a:solidFill>
+          <a:ln>
+            <a:noFill/>
+          </a:ln>
+          <a:effectLst/>
+        </p:spPr>
+        <p:style>
+          <a:lnRef idx="1">
+            <a:schemeClr val="accent1"/>
+          </a:lnRef>
+          <a:fillRef idx="3">
+            <a:schemeClr val="accent1"/>
+          </a:fillRef>
+          <a:effectRef idx="2">
+            <a:schemeClr val="accent1"/>
+          </a:effectRef>
+          <a:fontRef idx="minor">
+            <a:schemeClr val="lt1"/>
+          </a:fontRef>
+        </p:style>
+        <p:txBody>
+          <a:bodyPr rtlCol="0" anchor="ctr"/>
+          <a:lstStyle/>
+          <a:p>
+            <a:pPr algn="ctr"/>
+          </a:p>
+        </p:txBody>
+      </p:sp>
+      <p:sp>
+        <p:nvSpPr>
+          <p:cNvPr id="6" name="TextBox 5"/>
+          <p:cNvSpPr txBox="1"/>
+          <p:nvPr/>
+        </p:nvSpPr>
+        <p:spPr>
+          <a:xfrm>
+            <a:off x="859536" y="4626864"/>
+            <a:ext cx="10479024" cy="1051560"/>
+          </a:xfrm>
+          <a:prstGeom prst="rect">
+            <a:avLst/>
+          </a:prstGeom>
+          <a:noFill/>
+        </p:spPr>
+        <p:txBody>
+          <a:bodyPr wrap="square">
+            <a:spAutoFit/>
+          </a:bodyPr>
+          <a:lstStyle/>
+          <a:p>
+            <a:pPr>
+              <a:spcAft>
+                <a:spcPts val="700"/>
+              </a:spcAft>
+            </a:pPr>
+            <a:r>
+              <a:rPr sz="2300" b="1" i="0">
+                <a:solidFill>
+                  <a:srgbClr val="006E96"/>
+                </a:solidFill>
+                <a:latin typeface="Arial"/>
+              </a:rPr>
+              <a:t>An assessment built on a wrong picture produces wrong priorities.</a:t>
+            </a:r>
+          </a:p>
+        </p:txBody>
+      </p:sp>
+      <p:sp>
+        <p:nvSpPr>
+          <p:cNvPr id="7" name="TextBox 6"/>
+          <p:cNvSpPr txBox="1"/>
+          <p:nvPr/>
+        </p:nvSpPr>
+        <p:spPr>
+          <a:xfrm>
+            <a:off x="457200" y="6473952"/>
+            <a:ext cx="7772400" cy="292608"/>
+          </a:xfrm>
+          <a:prstGeom prst="rect">
+            <a:avLst/>
+          </a:prstGeom>
+          <a:noFill/>
+        </p:spPr>
+        <p:txBody>
+          <a:bodyPr wrap="square">
+            <a:spAutoFit/>
+          </a:bodyPr>
+          <a:lstStyle/>
+          <a:p>
+            <a:r>
+              <a:rPr sz="900" b="0" i="0">
+                <a:solidFill>
+                  <a:srgbClr val="595959"/>
+                </a:solidFill>
+                <a:latin typeface="Arial"/>
+              </a:rPr>
+              <a:t>4.2 · Phase 1, Discover — map what the sector has today</a:t>
+            </a:r>
+          </a:p>
+        </p:txBody>
+      </p:sp>
+    </p:spTree>
+  </p:cSld>
+  <p:clrMapOvr>
+    <a:masterClrMapping/>
+  </p:clrMapOvr>
+</p:sld>
+</file>
+
+<file path=ppt/slides/slide17.xml><?xml version="1.0" encoding="utf-8"?>
+<p:sld xmlns:a="http://schemas.openxmlformats.org/drawingml/2006/main" xmlns:p="http://schemas.openxmlformats.org/presentationml/2006/main" xmlns:r="http://schemas.openxmlformats.org/officeDocument/2006/relationships">
+  <p:cSld>
+    <p:spTree>
+      <p:nvGrpSpPr>
+        <p:cNvPr id="1" name=""/>
+        <p:cNvGrpSpPr/>
+        <p:nvPr/>
+      </p:nvGrpSpPr>
+      <p:grpSpPr/>
+      <p:sp>
+        <p:nvSpPr>
           <p:cNvPr id="2" name="TextBox 1"/>
           <p:cNvSpPr txBox="1"/>
           <p:nvPr/>
@@ -14423,7 +13937,7 @@
 </p:sld>
 </file>
 
-<file path=ppt/slides/slide16.xml><?xml version="1.0" encoding="utf-8"?>
+<file path=ppt/slides/slide18.xml><?xml version="1.0" encoding="utf-8"?>
 <p:sld xmlns:a="http://schemas.openxmlformats.org/drawingml/2006/main" xmlns:p="http://schemas.openxmlformats.org/presentationml/2006/main" xmlns:r="http://schemas.openxmlformats.org/officeDocument/2006/relationships">
   <p:cSld>
     <p:spTree>

--- a/10-Knowledge-Products/KP1-GEA/videos/module_4/en/decks/KP1_M4_4.2_Deck_v0.2.pptx
+++ b/10-Knowledge-Products/KP1-GEA/videos/module_4/en/decks/KP1_M4_4.2_Deck_v0.2.pptx
@@ -11765,7 +11765,7 @@
                 </a:solidFill>
                 <a:latin typeface="Arial"/>
               </a:rPr>
-              <a:t>~4 minutes · standalone video · voice-over on text slides</a:t>
+              <a:t>standalone video · voice-over on text slides</a:t>
             </a:r>
           </a:p>
         </p:txBody>

--- a/10-Knowledge-Products/KP1-GEA/videos/module_4/en/decks/KP1_M4_4.2_Deck_v0.2.pptx
+++ b/10-Knowledge-Products/KP1-GEA/videos/module_4/en/decks/KP1_M4_4.2_Deck_v0.2.pptx
@@ -11629,7 +11629,7 @@
                 </a:solidFill>
                 <a:latin typeface="Arial"/>
               </a:rPr>
-              <a:t>KP1 · MODULE 4 · VIDEO 4.2</a:t>
+              <a:t>MODULE 4 · VIDEO 4.2</a:t>
             </a:r>
           </a:p>
         </p:txBody>
